--- a/lecons/F5/21_F5_M1_L18_Trade_Blocs.pptx
+++ b/lecons/F5/21_F5_M1_L18_Trade_Blocs.pptx
@@ -58,9 +58,15 @@
     <p:sldId id="306" r:id="rId52"/>
     <p:sldId id="307" r:id="rId53"/>
     <p:sldId id="308" r:id="rId54"/>
+    <p:sldId id="309" r:id="rId55"/>
+    <p:sldId id="310" r:id="rId56"/>
+    <p:sldId id="311" r:id="rId57"/>
+    <p:sldId id="312" r:id="rId58"/>
+    <p:sldId id="313" r:id="rId59"/>
+    <p:sldId id="314" r:id="rId60"/>
   </p:sldIdLst>
   <p:notesMasterIdLst>
-    <p:notesMasterId r:id="rId55"/>
+    <p:notesMasterId r:id="rId61"/>
   </p:notesMasterIdLst>
   <p:sldSz cx="12192000" cy="6858000"/>
   <p:notesSz cx="6858000" cy="12192000"/>
@@ -3106,7 +3112,7 @@
           <a:p>
             <a:r>
               <a:rPr lang="en-US" dirty="0"/>
-              <a:t>Let us copy Types, Aims and Reasons for Creation. Trade blocs are organised as follows. On this slide we have Types and Examples. Write each point on a new line, with the key term first, and explain it in your own words when we revise. When you finish, we go to the next slide.</a:t>
+              <a:t>Let us copy Types. There are the following types of trade blocs. On this slide we have Free trade areas and Customs unions. Write each point on a new line, with the key term first, and explain it in your own words when we revise. When you finish, we go to the next slide.</a:t>
             </a:r>
             <a:endParaRPr lang="en-US" dirty="0"/>
           </a:p>
@@ -3194,7 +3200,7 @@
           <a:p>
             <a:r>
               <a:rPr lang="en-US" dirty="0"/>
-              <a:t>We continue with Types, Aims and Reasons for Creation. On this slide we have Aims and Reasons. Write each point on a new line, with the key term first, and explain it in your own words when we revise.</a:t>
+              <a:t>We continue with Types. On this slide we have Common markets and Economic unions. Write each point on a new line, with the key term first, and explain it in your own words when we revise.</a:t>
             </a:r>
             <a:endParaRPr lang="en-US" dirty="0"/>
           </a:p>
@@ -3282,7 +3288,7 @@
           <a:p>
             <a:r>
               <a:rPr lang="en-US" dirty="0"/>
-              <a:t>Now draw this illustration in your notebook: trade blocs in Africa. Give it a title and label it clearly.</a:t>
+              <a:t>Let us copy Examples, Aims and Reasons. Trade blocs are created as follows. On this slide we have Examples and Aims. Write each point on a new line, with the key term first, and explain it in your own words when we revise. When you finish, we go to the next slide.</a:t>
             </a:r>
             <a:endParaRPr lang="en-US" dirty="0"/>
           </a:p>
@@ -3370,7 +3376,7 @@
           <a:p>
             <a:r>
               <a:rPr lang="en-US" dirty="0"/>
-              <a:t>Let us copy Case Study: CEMAC. CEMAC is an example of a trade bloc in LICs. On this slide we have Members and Achievements. Write each point on a new line, with the key term first, and explain it in your own words when we revise. When you finish, we go to the next slide.</a:t>
+              <a:t>We continue with Examples, Aims and Reasons. On this slide we have Reasons. Write each point on a new line, with the key term first, and explain it in your own words when we revise.</a:t>
             </a:r>
             <a:endParaRPr lang="en-US" dirty="0"/>
           </a:p>
@@ -3546,7 +3552,7 @@
           <a:p>
             <a:r>
               <a:rPr lang="en-US" dirty="0"/>
-              <a:t>We continue with Case Study: CEMAC. On this slide we have Problems. Write each point on a new line, with the key term first, and explain it in your own words when we revise.</a:t>
+              <a:t>Now draw this illustration in your notebook: trade blocs in Africa. Give it a title and label it clearly.</a:t>
             </a:r>
             <a:endParaRPr lang="en-US" dirty="0"/>
           </a:p>
@@ -3634,7 +3640,7 @@
           <a:p>
             <a:r>
               <a:rPr lang="en-US" dirty="0"/>
-              <a:t>Let us copy Advantages and Disadvantages. Trade blocs have the following advantages and disadvantages. On this slide we have Advantages and Disadvantages. Write each point on a new line, with the key term first, and explain it in your own words when we revise.</a:t>
+              <a:t>Let us copy Members and Achievements. CEMAC has the following members and achievements. On this slide we have Members. Write each point on a new line, with the key term first, and explain it in your own words when we revise. When you finish, we go to the next slide.</a:t>
             </a:r>
             <a:endParaRPr lang="en-US" dirty="0"/>
           </a:p>
@@ -3722,7 +3728,7 @@
           <a:p>
             <a:r>
               <a:rPr lang="en-US" dirty="0"/>
-              <a:t>Now let us check what you have understood. Question 1: Define a trade bloc. Answer in your exercise book.</a:t>
+              <a:t>We continue with Members and Achievements. On this slide we have Common currency and Common external tariff. Write each point on a new line, with the key term first, and explain it in your own words when we revise.</a:t>
             </a:r>
             <a:endParaRPr lang="en-US" dirty="0"/>
           </a:p>
@@ -3810,7 +3816,7 @@
           <a:p>
             <a:r>
               <a:rPr lang="en-US" dirty="0"/>
-              <a:t>The expected answer is: a group of countries that reduce trade barriers among themselves. If you got it right, well done.</a:t>
+              <a:t>Let us copy Problems. CEMAC faces the following problems. On this slide we have Poor roads and Road checks. Write each point on a new line, with the key term first, and explain it in your own words when we revise. When you finish, we go to the next slide.</a:t>
             </a:r>
             <a:endParaRPr lang="en-US" dirty="0"/>
           </a:p>
@@ -3898,7 +3904,7 @@
           <a:p>
             <a:r>
               <a:rPr lang="en-US" dirty="0"/>
-              <a:t>Now let us check what you have understood. Question 2: Name two trade blocs and one advantage. Answer in your exercise book.</a:t>
+              <a:t>We continue with Problems. On this slide we have Similar exports. Write each point on a new line, with the key term first, and explain it in your own words when we revise.</a:t>
             </a:r>
             <a:endParaRPr lang="en-US" dirty="0"/>
           </a:p>
@@ -3986,7 +3992,7 @@
           <a:p>
             <a:r>
               <a:rPr lang="en-US" dirty="0"/>
-              <a:t>The expected answer is: cEMAC and ECOWAS; a larger market. If you got it right, well done.</a:t>
+              <a:t>Let us copy Advantages. Trade blocs have the following advantages. On this slide we have A larger market and More investment. Write each point on a new line, with the key term first, and explain it in your own words when we revise. When you finish, we go to the next slide.</a:t>
             </a:r>
             <a:endParaRPr lang="en-US" dirty="0"/>
           </a:p>
@@ -4074,7 +4080,7 @@
           <a:p>
             <a:r>
               <a:rPr lang="en-US" dirty="0"/>
-              <a:t>For those who need more practice, fill in the blanks in your exercise book. The answers are: number 1, CEMAC; number 2, ECOWAS; number 3, ASEAN.</a:t>
+              <a:t>We continue with Advantages. On this slide we have Free movement of people. Write each point on a new line, with the key term first, and explain it in your own words when we revise.</a:t>
             </a:r>
             <a:endParaRPr lang="en-US" dirty="0"/>
           </a:p>
@@ -4162,7 +4168,7 @@
           <a:p>
             <a:r>
               <a:rPr lang="en-US" dirty="0"/>
-              <a:t>For your homework: Draw a sketch map of the CEMAC member states and name their capitals. We shall correct it at the beginning of our next lesson.</a:t>
+              <a:t>Let us copy Disadvantages. Trade blocs have the following disadvantages. On this slide we have Loss of customs revenue and Loss of local industries. Write each point on a new line, with the key term first, and explain it in your own words when we revise.</a:t>
             </a:r>
             <a:endParaRPr lang="en-US" dirty="0"/>
           </a:p>
@@ -4250,7 +4256,7 @@
           <a:p>
             <a:r>
               <a:rPr lang="en-US" dirty="0"/>
-              <a:t>Our next lesson will be on Lesson 19: Tourism. Thank you for your attention, and see you next time.</a:t>
+              <a:t>Now let us check what you have understood. Question 1: Define a trade bloc. Answer in your exercise book.</a:t>
             </a:r>
             <a:endParaRPr lang="en-US" dirty="0"/>
           </a:p>
@@ -4338,7 +4344,7 @@
           <a:p>
             <a:r>
               <a:rPr lang="en-US" dirty="0"/>
-              <a:t>Let us play the bilingual game. I say a word in English, and you give me the French word. Then we do the reverse.</a:t>
+              <a:t>The expected answer is: a group of countries that reduce trade barriers among themselves. If you got it right, well done.</a:t>
             </a:r>
             <a:endParaRPr lang="en-US" dirty="0"/>
           </a:p>
@@ -4514,7 +4520,7 @@
           <a:p>
             <a:r>
               <a:rPr lang="en-US" dirty="0"/>
-              <a:t>I record this information in the official logbook of the class after the lesson.</a:t>
+              <a:t>Now let us check what you have understood. Question 2: Name two trade blocs and one advantage. Answer in your exercise book.</a:t>
             </a:r>
             <a:endParaRPr lang="en-US" dirty="0"/>
           </a:p>
@@ -4602,7 +4608,7 @@
           <a:p>
             <a:r>
               <a:rPr lang="en-US" dirty="0"/>
-              <a:t>I complete the second page of the logbook: the matter taught, the evaluation, the homework and the attendance.</a:t>
+              <a:t>The expected answer is: cEMAC and ECOWAS; a larger market. If you got it right, well done.</a:t>
             </a:r>
             <a:endParaRPr lang="en-US" dirty="0"/>
           </a:p>
@@ -4690,7 +4696,7 @@
           <a:p>
             <a:r>
               <a:rPr lang="en-US" dirty="0"/>
-              <a:t>This slide is for me, the teacher: it gives the timing of the lesson and what to do if the projector is not available.</a:t>
+              <a:t>For those who need more practice, fill in the blanks in your exercise book. The answers are: number 1, CEMAC; number 2, ECOWAS; number 3, ASEAN.</a:t>
             </a:r>
             <a:endParaRPr lang="en-US" dirty="0"/>
           </a:p>
@@ -4778,7 +4784,7 @@
           <a:p>
             <a:r>
               <a:rPr lang="en-US" dirty="0"/>
-              <a:t>These are the references and picture credits used to prepare this lesson.</a:t>
+              <a:t>For your homework: Draw a sketch map of the CEMAC member states and name their capitals. We shall correct it at the beginning of our next lesson.</a:t>
             </a:r>
             <a:endParaRPr lang="en-US" dirty="0"/>
           </a:p>
@@ -4802,6 +4808,534 @@
             <a:fld id="{F7021451-1387-4CA6-816F-3879F97B5CBC}" type="slidenum">
               <a:rPr lang="en-US"/>
               <a:t>53</a:t>
+            </a:fld>
+            <a:endParaRPr lang="en-US"/>
+          </a:p>
+        </p:txBody>
+      </p:sp>
+    </p:spTree>
+    <p:extLst>
+      <p:ext uri="{BB962C8B-B14F-4D97-AF65-F5344CB8AC3E}">
+        <p14:creationId xmlns:p14="http://schemas.microsoft.com/office/powerpoint/2010/main" val="1024086991"/>
+      </p:ext>
+    </p:extLst>
+  </p:cSld>
+  <p:clrMapOvr>
+    <a:masterClrMapping/>
+  </p:clrMapOvr>
+</p:notes>
+</file>
+
+<file path=ppt/notesSlides/notesSlide54.xml><?xml version="1.0" encoding="utf-8"?>
+<p:notes xmlns:a="http://schemas.openxmlformats.org/drawingml/2006/main" xmlns:r="http://schemas.openxmlformats.org/officeDocument/2006/relationships" xmlns:p="http://schemas.openxmlformats.org/presentationml/2006/main">
+  <p:cSld>
+    <p:spTree>
+      <p:nvGrpSpPr>
+        <p:cNvPr id="1" name=""/>
+        <p:cNvGrpSpPr/>
+        <p:nvPr/>
+      </p:nvGrpSpPr>
+      <p:grpSpPr>
+        <a:xfrm>
+          <a:off x="0" y="0"/>
+          <a:ext cx="0" cy="0"/>
+          <a:chOff x="0" y="0"/>
+          <a:chExt cx="0" cy="0"/>
+        </a:xfrm>
+      </p:grpSpPr>
+      <p:sp>
+        <p:nvSpPr>
+          <p:cNvPr id="2" name="Slide Image Placeholder 1"/>
+          <p:cNvSpPr>
+            <a:spLocks noGrp="1" noRot="1" noChangeAspect="1"/>
+          </p:cNvSpPr>
+          <p:nvPr>
+            <p:ph type="sldImg"/>
+          </p:nvPr>
+        </p:nvSpPr>
+        <p:spPr/>
+      </p:sp>
+      <p:sp>
+        <p:nvSpPr>
+          <p:cNvPr id="3" name="Notes Placeholder 2"/>
+          <p:cNvSpPr>
+            <a:spLocks noGrp="1"/>
+          </p:cNvSpPr>
+          <p:nvPr>
+            <p:ph type="body" idx="1"/>
+          </p:nvPr>
+        </p:nvSpPr>
+        <p:spPr/>
+        <p:txBody>
+          <a:bodyPr/>
+          <a:lstStyle/>
+          <a:p>
+            <a:r>
+              <a:rPr lang="en-US" dirty="0"/>
+              <a:t>Our next lesson will be on Lesson 19: Tourism. Thank you for your attention, and see you next time.</a:t>
+            </a:r>
+            <a:endParaRPr lang="en-US" dirty="0"/>
+          </a:p>
+        </p:txBody>
+      </p:sp>
+      <p:sp>
+        <p:nvSpPr>
+          <p:cNvPr id="4" name="Slide Number Placeholder 3"/>
+          <p:cNvSpPr>
+            <a:spLocks noGrp="1"/>
+          </p:cNvSpPr>
+          <p:nvPr>
+            <p:ph type="sldNum" sz="quarter" idx="10"/>
+          </p:nvPr>
+        </p:nvSpPr>
+        <p:spPr/>
+        <p:txBody>
+          <a:bodyPr/>
+          <a:lstStyle/>
+          <a:p>
+            <a:fld id="{F7021451-1387-4CA6-816F-3879F97B5CBC}" type="slidenum">
+              <a:rPr lang="en-US"/>
+              <a:t>54</a:t>
+            </a:fld>
+            <a:endParaRPr lang="en-US"/>
+          </a:p>
+        </p:txBody>
+      </p:sp>
+    </p:spTree>
+    <p:extLst>
+      <p:ext uri="{BB962C8B-B14F-4D97-AF65-F5344CB8AC3E}">
+        <p14:creationId xmlns:p14="http://schemas.microsoft.com/office/powerpoint/2010/main" val="1024086991"/>
+      </p:ext>
+    </p:extLst>
+  </p:cSld>
+  <p:clrMapOvr>
+    <a:masterClrMapping/>
+  </p:clrMapOvr>
+</p:notes>
+</file>
+
+<file path=ppt/notesSlides/notesSlide55.xml><?xml version="1.0" encoding="utf-8"?>
+<p:notes xmlns:a="http://schemas.openxmlformats.org/drawingml/2006/main" xmlns:r="http://schemas.openxmlformats.org/officeDocument/2006/relationships" xmlns:p="http://schemas.openxmlformats.org/presentationml/2006/main">
+  <p:cSld>
+    <p:spTree>
+      <p:nvGrpSpPr>
+        <p:cNvPr id="1" name=""/>
+        <p:cNvGrpSpPr/>
+        <p:nvPr/>
+      </p:nvGrpSpPr>
+      <p:grpSpPr>
+        <a:xfrm>
+          <a:off x="0" y="0"/>
+          <a:ext cx="0" cy="0"/>
+          <a:chOff x="0" y="0"/>
+          <a:chExt cx="0" cy="0"/>
+        </a:xfrm>
+      </p:grpSpPr>
+      <p:sp>
+        <p:nvSpPr>
+          <p:cNvPr id="2" name="Slide Image Placeholder 1"/>
+          <p:cNvSpPr>
+            <a:spLocks noGrp="1" noRot="1" noChangeAspect="1"/>
+          </p:cNvSpPr>
+          <p:nvPr>
+            <p:ph type="sldImg"/>
+          </p:nvPr>
+        </p:nvSpPr>
+        <p:spPr/>
+      </p:sp>
+      <p:sp>
+        <p:nvSpPr>
+          <p:cNvPr id="3" name="Notes Placeholder 2"/>
+          <p:cNvSpPr>
+            <a:spLocks noGrp="1"/>
+          </p:cNvSpPr>
+          <p:nvPr>
+            <p:ph type="body" idx="1"/>
+          </p:nvPr>
+        </p:nvSpPr>
+        <p:spPr/>
+        <p:txBody>
+          <a:bodyPr/>
+          <a:lstStyle/>
+          <a:p>
+            <a:r>
+              <a:rPr lang="en-US" dirty="0"/>
+              <a:t>Let us play the bilingual game. I say a word in English, and you give me the French word. Then we do the reverse.</a:t>
+            </a:r>
+            <a:endParaRPr lang="en-US" dirty="0"/>
+          </a:p>
+        </p:txBody>
+      </p:sp>
+      <p:sp>
+        <p:nvSpPr>
+          <p:cNvPr id="4" name="Slide Number Placeholder 3"/>
+          <p:cNvSpPr>
+            <a:spLocks noGrp="1"/>
+          </p:cNvSpPr>
+          <p:nvPr>
+            <p:ph type="sldNum" sz="quarter" idx="10"/>
+          </p:nvPr>
+        </p:nvSpPr>
+        <p:spPr/>
+        <p:txBody>
+          <a:bodyPr/>
+          <a:lstStyle/>
+          <a:p>
+            <a:fld id="{F7021451-1387-4CA6-816F-3879F97B5CBC}" type="slidenum">
+              <a:rPr lang="en-US"/>
+              <a:t>55</a:t>
+            </a:fld>
+            <a:endParaRPr lang="en-US"/>
+          </a:p>
+        </p:txBody>
+      </p:sp>
+    </p:spTree>
+    <p:extLst>
+      <p:ext uri="{BB962C8B-B14F-4D97-AF65-F5344CB8AC3E}">
+        <p14:creationId xmlns:p14="http://schemas.microsoft.com/office/powerpoint/2010/main" val="1024086991"/>
+      </p:ext>
+    </p:extLst>
+  </p:cSld>
+  <p:clrMapOvr>
+    <a:masterClrMapping/>
+  </p:clrMapOvr>
+</p:notes>
+</file>
+
+<file path=ppt/notesSlides/notesSlide56.xml><?xml version="1.0" encoding="utf-8"?>
+<p:notes xmlns:a="http://schemas.openxmlformats.org/drawingml/2006/main" xmlns:r="http://schemas.openxmlformats.org/officeDocument/2006/relationships" xmlns:p="http://schemas.openxmlformats.org/presentationml/2006/main">
+  <p:cSld>
+    <p:spTree>
+      <p:nvGrpSpPr>
+        <p:cNvPr id="1" name=""/>
+        <p:cNvGrpSpPr/>
+        <p:nvPr/>
+      </p:nvGrpSpPr>
+      <p:grpSpPr>
+        <a:xfrm>
+          <a:off x="0" y="0"/>
+          <a:ext cx="0" cy="0"/>
+          <a:chOff x="0" y="0"/>
+          <a:chExt cx="0" cy="0"/>
+        </a:xfrm>
+      </p:grpSpPr>
+      <p:sp>
+        <p:nvSpPr>
+          <p:cNvPr id="2" name="Slide Image Placeholder 1"/>
+          <p:cNvSpPr>
+            <a:spLocks noGrp="1" noRot="1" noChangeAspect="1"/>
+          </p:cNvSpPr>
+          <p:nvPr>
+            <p:ph type="sldImg"/>
+          </p:nvPr>
+        </p:nvSpPr>
+        <p:spPr/>
+      </p:sp>
+      <p:sp>
+        <p:nvSpPr>
+          <p:cNvPr id="3" name="Notes Placeholder 2"/>
+          <p:cNvSpPr>
+            <a:spLocks noGrp="1"/>
+          </p:cNvSpPr>
+          <p:nvPr>
+            <p:ph type="body" idx="1"/>
+          </p:nvPr>
+        </p:nvSpPr>
+        <p:spPr/>
+        <p:txBody>
+          <a:bodyPr/>
+          <a:lstStyle/>
+          <a:p>
+            <a:r>
+              <a:rPr lang="en-US" dirty="0"/>
+              <a:t>I record this information in the official logbook of the class after the lesson.</a:t>
+            </a:r>
+            <a:endParaRPr lang="en-US" dirty="0"/>
+          </a:p>
+        </p:txBody>
+      </p:sp>
+      <p:sp>
+        <p:nvSpPr>
+          <p:cNvPr id="4" name="Slide Number Placeholder 3"/>
+          <p:cNvSpPr>
+            <a:spLocks noGrp="1"/>
+          </p:cNvSpPr>
+          <p:nvPr>
+            <p:ph type="sldNum" sz="quarter" idx="10"/>
+          </p:nvPr>
+        </p:nvSpPr>
+        <p:spPr/>
+        <p:txBody>
+          <a:bodyPr/>
+          <a:lstStyle/>
+          <a:p>
+            <a:fld id="{F7021451-1387-4CA6-816F-3879F97B5CBC}" type="slidenum">
+              <a:rPr lang="en-US"/>
+              <a:t>56</a:t>
+            </a:fld>
+            <a:endParaRPr lang="en-US"/>
+          </a:p>
+        </p:txBody>
+      </p:sp>
+    </p:spTree>
+    <p:extLst>
+      <p:ext uri="{BB962C8B-B14F-4D97-AF65-F5344CB8AC3E}">
+        <p14:creationId xmlns:p14="http://schemas.microsoft.com/office/powerpoint/2010/main" val="1024086991"/>
+      </p:ext>
+    </p:extLst>
+  </p:cSld>
+  <p:clrMapOvr>
+    <a:masterClrMapping/>
+  </p:clrMapOvr>
+</p:notes>
+</file>
+
+<file path=ppt/notesSlides/notesSlide57.xml><?xml version="1.0" encoding="utf-8"?>
+<p:notes xmlns:a="http://schemas.openxmlformats.org/drawingml/2006/main" xmlns:r="http://schemas.openxmlformats.org/officeDocument/2006/relationships" xmlns:p="http://schemas.openxmlformats.org/presentationml/2006/main">
+  <p:cSld>
+    <p:spTree>
+      <p:nvGrpSpPr>
+        <p:cNvPr id="1" name=""/>
+        <p:cNvGrpSpPr/>
+        <p:nvPr/>
+      </p:nvGrpSpPr>
+      <p:grpSpPr>
+        <a:xfrm>
+          <a:off x="0" y="0"/>
+          <a:ext cx="0" cy="0"/>
+          <a:chOff x="0" y="0"/>
+          <a:chExt cx="0" cy="0"/>
+        </a:xfrm>
+      </p:grpSpPr>
+      <p:sp>
+        <p:nvSpPr>
+          <p:cNvPr id="2" name="Slide Image Placeholder 1"/>
+          <p:cNvSpPr>
+            <a:spLocks noGrp="1" noRot="1" noChangeAspect="1"/>
+          </p:cNvSpPr>
+          <p:nvPr>
+            <p:ph type="sldImg"/>
+          </p:nvPr>
+        </p:nvSpPr>
+        <p:spPr/>
+      </p:sp>
+      <p:sp>
+        <p:nvSpPr>
+          <p:cNvPr id="3" name="Notes Placeholder 2"/>
+          <p:cNvSpPr>
+            <a:spLocks noGrp="1"/>
+          </p:cNvSpPr>
+          <p:nvPr>
+            <p:ph type="body" idx="1"/>
+          </p:nvPr>
+        </p:nvSpPr>
+        <p:spPr/>
+        <p:txBody>
+          <a:bodyPr/>
+          <a:lstStyle/>
+          <a:p>
+            <a:r>
+              <a:rPr lang="en-US" dirty="0"/>
+              <a:t>I complete the second page of the logbook: the matter taught, the evaluation, the homework and the attendance.</a:t>
+            </a:r>
+            <a:endParaRPr lang="en-US" dirty="0"/>
+          </a:p>
+        </p:txBody>
+      </p:sp>
+      <p:sp>
+        <p:nvSpPr>
+          <p:cNvPr id="4" name="Slide Number Placeholder 3"/>
+          <p:cNvSpPr>
+            <a:spLocks noGrp="1"/>
+          </p:cNvSpPr>
+          <p:nvPr>
+            <p:ph type="sldNum" sz="quarter" idx="10"/>
+          </p:nvPr>
+        </p:nvSpPr>
+        <p:spPr/>
+        <p:txBody>
+          <a:bodyPr/>
+          <a:lstStyle/>
+          <a:p>
+            <a:fld id="{F7021451-1387-4CA6-816F-3879F97B5CBC}" type="slidenum">
+              <a:rPr lang="en-US"/>
+              <a:t>57</a:t>
+            </a:fld>
+            <a:endParaRPr lang="en-US"/>
+          </a:p>
+        </p:txBody>
+      </p:sp>
+    </p:spTree>
+    <p:extLst>
+      <p:ext uri="{BB962C8B-B14F-4D97-AF65-F5344CB8AC3E}">
+        <p14:creationId xmlns:p14="http://schemas.microsoft.com/office/powerpoint/2010/main" val="1024086991"/>
+      </p:ext>
+    </p:extLst>
+  </p:cSld>
+  <p:clrMapOvr>
+    <a:masterClrMapping/>
+  </p:clrMapOvr>
+</p:notes>
+</file>
+
+<file path=ppt/notesSlides/notesSlide58.xml><?xml version="1.0" encoding="utf-8"?>
+<p:notes xmlns:a="http://schemas.openxmlformats.org/drawingml/2006/main" xmlns:r="http://schemas.openxmlformats.org/officeDocument/2006/relationships" xmlns:p="http://schemas.openxmlformats.org/presentationml/2006/main">
+  <p:cSld>
+    <p:spTree>
+      <p:nvGrpSpPr>
+        <p:cNvPr id="1" name=""/>
+        <p:cNvGrpSpPr/>
+        <p:nvPr/>
+      </p:nvGrpSpPr>
+      <p:grpSpPr>
+        <a:xfrm>
+          <a:off x="0" y="0"/>
+          <a:ext cx="0" cy="0"/>
+          <a:chOff x="0" y="0"/>
+          <a:chExt cx="0" cy="0"/>
+        </a:xfrm>
+      </p:grpSpPr>
+      <p:sp>
+        <p:nvSpPr>
+          <p:cNvPr id="2" name="Slide Image Placeholder 1"/>
+          <p:cNvSpPr>
+            <a:spLocks noGrp="1" noRot="1" noChangeAspect="1"/>
+          </p:cNvSpPr>
+          <p:nvPr>
+            <p:ph type="sldImg"/>
+          </p:nvPr>
+        </p:nvSpPr>
+        <p:spPr/>
+      </p:sp>
+      <p:sp>
+        <p:nvSpPr>
+          <p:cNvPr id="3" name="Notes Placeholder 2"/>
+          <p:cNvSpPr>
+            <a:spLocks noGrp="1"/>
+          </p:cNvSpPr>
+          <p:nvPr>
+            <p:ph type="body" idx="1"/>
+          </p:nvPr>
+        </p:nvSpPr>
+        <p:spPr/>
+        <p:txBody>
+          <a:bodyPr/>
+          <a:lstStyle/>
+          <a:p>
+            <a:r>
+              <a:rPr lang="en-US" dirty="0"/>
+              <a:t>This slide is for me, the teacher: it gives the timing of the lesson and what to do if the projector is not available.</a:t>
+            </a:r>
+            <a:endParaRPr lang="en-US" dirty="0"/>
+          </a:p>
+        </p:txBody>
+      </p:sp>
+      <p:sp>
+        <p:nvSpPr>
+          <p:cNvPr id="4" name="Slide Number Placeholder 3"/>
+          <p:cNvSpPr>
+            <a:spLocks noGrp="1"/>
+          </p:cNvSpPr>
+          <p:nvPr>
+            <p:ph type="sldNum" sz="quarter" idx="10"/>
+          </p:nvPr>
+        </p:nvSpPr>
+        <p:spPr/>
+        <p:txBody>
+          <a:bodyPr/>
+          <a:lstStyle/>
+          <a:p>
+            <a:fld id="{F7021451-1387-4CA6-816F-3879F97B5CBC}" type="slidenum">
+              <a:rPr lang="en-US"/>
+              <a:t>58</a:t>
+            </a:fld>
+            <a:endParaRPr lang="en-US"/>
+          </a:p>
+        </p:txBody>
+      </p:sp>
+    </p:spTree>
+    <p:extLst>
+      <p:ext uri="{BB962C8B-B14F-4D97-AF65-F5344CB8AC3E}">
+        <p14:creationId xmlns:p14="http://schemas.microsoft.com/office/powerpoint/2010/main" val="1024086991"/>
+      </p:ext>
+    </p:extLst>
+  </p:cSld>
+  <p:clrMapOvr>
+    <a:masterClrMapping/>
+  </p:clrMapOvr>
+</p:notes>
+</file>
+
+<file path=ppt/notesSlides/notesSlide59.xml><?xml version="1.0" encoding="utf-8"?>
+<p:notes xmlns:a="http://schemas.openxmlformats.org/drawingml/2006/main" xmlns:r="http://schemas.openxmlformats.org/officeDocument/2006/relationships" xmlns:p="http://schemas.openxmlformats.org/presentationml/2006/main">
+  <p:cSld>
+    <p:spTree>
+      <p:nvGrpSpPr>
+        <p:cNvPr id="1" name=""/>
+        <p:cNvGrpSpPr/>
+        <p:nvPr/>
+      </p:nvGrpSpPr>
+      <p:grpSpPr>
+        <a:xfrm>
+          <a:off x="0" y="0"/>
+          <a:ext cx="0" cy="0"/>
+          <a:chOff x="0" y="0"/>
+          <a:chExt cx="0" cy="0"/>
+        </a:xfrm>
+      </p:grpSpPr>
+      <p:sp>
+        <p:nvSpPr>
+          <p:cNvPr id="2" name="Slide Image Placeholder 1"/>
+          <p:cNvSpPr>
+            <a:spLocks noGrp="1" noRot="1" noChangeAspect="1"/>
+          </p:cNvSpPr>
+          <p:nvPr>
+            <p:ph type="sldImg"/>
+          </p:nvPr>
+        </p:nvSpPr>
+        <p:spPr/>
+      </p:sp>
+      <p:sp>
+        <p:nvSpPr>
+          <p:cNvPr id="3" name="Notes Placeholder 2"/>
+          <p:cNvSpPr>
+            <a:spLocks noGrp="1"/>
+          </p:cNvSpPr>
+          <p:nvPr>
+            <p:ph type="body" idx="1"/>
+          </p:nvPr>
+        </p:nvSpPr>
+        <p:spPr/>
+        <p:txBody>
+          <a:bodyPr/>
+          <a:lstStyle/>
+          <a:p>
+            <a:r>
+              <a:rPr lang="en-US" dirty="0"/>
+              <a:t>These are the references and picture credits used to prepare this lesson.</a:t>
+            </a:r>
+            <a:endParaRPr lang="en-US" dirty="0"/>
+          </a:p>
+        </p:txBody>
+      </p:sp>
+      <p:sp>
+        <p:nvSpPr>
+          <p:cNvPr id="4" name="Slide Number Placeholder 3"/>
+          <p:cNvSpPr>
+            <a:spLocks noGrp="1"/>
+          </p:cNvSpPr>
+          <p:nvPr>
+            <p:ph type="sldNum" sz="quarter" idx="10"/>
+          </p:nvPr>
+        </p:nvSpPr>
+        <p:spPr/>
+        <p:txBody>
+          <a:bodyPr/>
+          <a:lstStyle/>
+          <a:p>
+            <a:fld id="{F7021451-1387-4CA6-816F-3879F97B5CBC}" type="slidenum">
+              <a:rPr lang="en-US"/>
+              <a:t>59</a:t>
             </a:fld>
             <a:endParaRPr lang="en-US"/>
           </a:p>
@@ -13860,7 +14394,7 @@
         <p:spPr>
           <a:xfrm>
             <a:off x="0" y="658368"/>
-            <a:ext cx="2468880" cy="5833872"/>
+            <a:ext cx="3840480" cy="5833872"/>
           </a:xfrm>
           <a:prstGeom prst="rect">
             <a:avLst/>
@@ -13875,8 +14409,8 @@
         </p:nvSpPr>
         <p:spPr>
           <a:xfrm>
-            <a:off x="2697480" y="1005840"/>
-            <a:ext cx="9174175" cy="731520"/>
+            <a:off x="4069080" y="1005840"/>
+            <a:ext cx="7802575" cy="731520"/>
           </a:xfrm>
           <a:prstGeom prst="rect">
             <a:avLst/>
@@ -13916,8 +14450,47 @@
         </p:nvSpPr>
         <p:spPr>
           <a:xfrm>
-            <a:off x="2697480" y="1783080"/>
-            <a:ext cx="9174175" cy="4663440"/>
+            <a:off x="4069080" y="1737360"/>
+            <a:ext cx="7802575" cy="457200"/>
+          </a:xfrm>
+          <a:prstGeom prst="rect">
+            <a:avLst/>
+          </a:prstGeom>
+          <a:noFill/>
+          <a:ln/>
+        </p:spPr>
+        <p:txBody>
+          <a:bodyPr wrap="square" lIns="0" tIns="0" rIns="0" bIns="0" rtlCol="0" anchor="ctr"/>
+          <a:lstStyle/>
+          <a:p>
+            <a:pPr algn="l" indent="0" marL="0">
+              <a:buNone/>
+            </a:pPr>
+            <a:r>
+              <a:rPr lang="en-US" sz="3200" b="1" dirty="0">
+                <a:solidFill>
+                  <a:srgbClr val="990011"/>
+                </a:solidFill>
+                <a:latin typeface="Times New Roman" pitchFamily="34" charset="0"/>
+                <a:ea typeface="Times New Roman" pitchFamily="34" charset="-122"/>
+                <a:cs typeface="Times New Roman" pitchFamily="34" charset="-120"/>
+              </a:rPr>
+              <a:t>A) Types</a:t>
+            </a:r>
+            <a:endParaRPr lang="en-US" sz="3200" dirty="0"/>
+          </a:p>
+        </p:txBody>
+      </p:sp>
+      <p:sp>
+        <p:nvSpPr>
+          <p:cNvPr id="6" name="Text 3"/>
+          <p:cNvSpPr/>
+          <p:nvPr/>
+        </p:nvSpPr>
+        <p:spPr>
+          <a:xfrm>
+            <a:off x="4069080" y="2240280"/>
+            <a:ext cx="7802575" cy="4206240"/>
           </a:xfrm>
           <a:prstGeom prst="rect">
             <a:avLst/>
@@ -13944,7 +14517,7 @@
                 <a:ea typeface="Times New Roman" pitchFamily="34" charset="-122"/>
                 <a:cs typeface="Times New Roman" pitchFamily="34" charset="-120"/>
               </a:rPr>
-              <a:t>Trade blocs are organised as follows:</a:t>
+              <a:t>There are the following types of trade blocs:</a:t>
             </a:r>
             <a:endParaRPr lang="en-US" sz="4000" dirty="0"/>
           </a:p>
@@ -13964,7 +14537,7 @@
                 <a:ea typeface="Times New Roman" pitchFamily="34" charset="-122"/>
                 <a:cs typeface="Times New Roman" pitchFamily="34" charset="-120"/>
               </a:rPr>
-              <a:t>Types: </a:t>
+              <a:t>Free trade areas: </a:t>
             </a:r>
             <a:pPr algn="l" indent="0" marL="0">
               <a:spcAft>
@@ -13981,7 +14554,7 @@
                 <a:ea typeface="Times New Roman" pitchFamily="34" charset="-122"/>
                 <a:cs typeface="Times New Roman" pitchFamily="34" charset="-120"/>
               </a:rPr>
-              <a:t>There are free trade areas, customs unions, common markets and economic unions.</a:t>
+              <a:t>Members remove customs duties among themselves.</a:t>
             </a:r>
             <a:endParaRPr lang="en-US" sz="4000" dirty="0"/>
           </a:p>
@@ -14001,7 +14574,7 @@
                 <a:ea typeface="Times New Roman" pitchFamily="34" charset="-122"/>
                 <a:cs typeface="Times New Roman" pitchFamily="34" charset="-120"/>
               </a:rPr>
-              <a:t>Examples: </a:t>
+              <a:t>Customs unions: </a:t>
             </a:r>
             <a:pPr algn="l" indent="0" marL="0">
               <a:spcAft>
@@ -14018,7 +14591,7 @@
                 <a:ea typeface="Times New Roman" pitchFamily="34" charset="-122"/>
                 <a:cs typeface="Times New Roman" pitchFamily="34" charset="-120"/>
               </a:rPr>
-              <a:t>CEMAC, ECOWAS, the European Union, ASEAN and LAFTA are trade blocs.</a:t>
+              <a:t>Members also share a common external tariff.</a:t>
             </a:r>
             <a:endParaRPr lang="en-US" sz="4000" dirty="0"/>
           </a:p>
@@ -14153,7 +14726,7 @@
         <p:spPr>
           <a:xfrm>
             <a:off x="0" y="658368"/>
-            <a:ext cx="3840480" cy="5833872"/>
+            <a:ext cx="5120640" cy="5833872"/>
           </a:xfrm>
           <a:prstGeom prst="rect">
             <a:avLst/>
@@ -14168,8 +14741,8 @@
         </p:nvSpPr>
         <p:spPr>
           <a:xfrm>
-            <a:off x="4069080" y="1005840"/>
-            <a:ext cx="7802575" cy="731520"/>
+            <a:off x="5349240" y="1005840"/>
+            <a:ext cx="6522415" cy="731520"/>
           </a:xfrm>
           <a:prstGeom prst="rect">
             <a:avLst/>
@@ -14195,7 +14768,7 @@
                 <a:ea typeface="Times New Roman" pitchFamily="34" charset="-122"/>
                 <a:cs typeface="Times New Roman" pitchFamily="34" charset="-120"/>
               </a:rPr>
-              <a:t>1. Types, Aims and Reasons for Creation (continued)</a:t>
+              <a:t>1. Types, Aims and Reasons for Creation</a:t>
             </a:r>
             <a:endParaRPr lang="en-US" sz="3600" dirty="0"/>
           </a:p>
@@ -14209,8 +14782,47 @@
         </p:nvSpPr>
         <p:spPr>
           <a:xfrm>
-            <a:off x="4069080" y="1783080"/>
-            <a:ext cx="7802575" cy="4663440"/>
+            <a:off x="5349240" y="1737360"/>
+            <a:ext cx="6522415" cy="457200"/>
+          </a:xfrm>
+          <a:prstGeom prst="rect">
+            <a:avLst/>
+          </a:prstGeom>
+          <a:noFill/>
+          <a:ln/>
+        </p:spPr>
+        <p:txBody>
+          <a:bodyPr wrap="square" lIns="0" tIns="0" rIns="0" bIns="0" rtlCol="0" anchor="ctr"/>
+          <a:lstStyle/>
+          <a:p>
+            <a:pPr algn="l" indent="0" marL="0">
+              <a:buNone/>
+            </a:pPr>
+            <a:r>
+              <a:rPr lang="en-US" sz="3200" b="1" dirty="0">
+                <a:solidFill>
+                  <a:srgbClr val="990011"/>
+                </a:solidFill>
+                <a:latin typeface="Times New Roman" pitchFamily="34" charset="0"/>
+                <a:ea typeface="Times New Roman" pitchFamily="34" charset="-122"/>
+                <a:cs typeface="Times New Roman" pitchFamily="34" charset="-120"/>
+              </a:rPr>
+              <a:t>A) Types (continued)</a:t>
+            </a:r>
+            <a:endParaRPr lang="en-US" sz="3200" dirty="0"/>
+          </a:p>
+        </p:txBody>
+      </p:sp>
+      <p:sp>
+        <p:nvSpPr>
+          <p:cNvPr id="6" name="Text 3"/>
+          <p:cNvSpPr/>
+          <p:nvPr/>
+        </p:nvSpPr>
+        <p:spPr>
+          <a:xfrm>
+            <a:off x="5349240" y="2240280"/>
+            <a:ext cx="6522415" cy="4206240"/>
           </a:xfrm>
           <a:prstGeom prst="rect">
             <a:avLst/>
@@ -14237,7 +14849,7 @@
                 <a:ea typeface="Times New Roman" pitchFamily="34" charset="-122"/>
                 <a:cs typeface="Times New Roman" pitchFamily="34" charset="-120"/>
               </a:rPr>
-              <a:t>Aims: </a:t>
+              <a:t>Common markets: </a:t>
             </a:r>
             <a:pPr algn="l" indent="0" marL="0">
               <a:spcAft>
@@ -14254,7 +14866,7 @@
                 <a:ea typeface="Times New Roman" pitchFamily="34" charset="-122"/>
                 <a:cs typeface="Times New Roman" pitchFamily="34" charset="-120"/>
               </a:rPr>
-              <a:t>They increase trade, attract investment and strengthen members in world markets.</a:t>
+              <a:t>Goods, people and capital move freely.</a:t>
             </a:r>
             <a:endParaRPr lang="en-US" sz="4000" dirty="0"/>
           </a:p>
@@ -14274,7 +14886,7 @@
                 <a:ea typeface="Times New Roman" pitchFamily="34" charset="-122"/>
                 <a:cs typeface="Times New Roman" pitchFamily="34" charset="-120"/>
               </a:rPr>
-              <a:t>Reasons: </a:t>
+              <a:t>Economic unions: </a:t>
             </a:r>
             <a:pPr algn="l" indent="0" marL="0">
               <a:spcAft>
@@ -14291,7 +14903,7 @@
                 <a:ea typeface="Times New Roman" pitchFamily="34" charset="-122"/>
                 <a:cs typeface="Times New Roman" pitchFamily="34" charset="-120"/>
               </a:rPr>
-              <a:t>Small national markets and competition from big powers push countries to unite.</a:t>
+              <a:t>Members also share common policies and sometimes a currency.</a:t>
             </a:r>
             <a:endParaRPr lang="en-US" sz="4000" dirty="0"/>
           </a:p>
@@ -14409,48 +15021,9 @@
           </a:p>
         </p:txBody>
       </p:sp>
-      <p:sp>
-        <p:nvSpPr>
-          <p:cNvPr id="3" name="Text 1"/>
-          <p:cNvSpPr/>
-          <p:nvPr/>
-        </p:nvSpPr>
-        <p:spPr>
-          <a:xfrm>
-            <a:off x="457200" y="1005840"/>
-            <a:ext cx="11277295" cy="731520"/>
-          </a:xfrm>
-          <a:prstGeom prst="rect">
-            <a:avLst/>
-          </a:prstGeom>
-          <a:noFill/>
-          <a:ln/>
-        </p:spPr>
-        <p:txBody>
-          <a:bodyPr wrap="square" lIns="0" tIns="0" rIns="0" bIns="0" rtlCol="0" anchor="ctr"/>
-          <a:lstStyle/>
-          <a:p>
-            <a:pPr algn="ctr" indent="0" marL="0">
-              <a:buNone/>
-            </a:pPr>
-            <a:r>
-              <a:rPr lang="en-US" sz="3600" b="1" dirty="0">
-                <a:solidFill>
-                  <a:srgbClr val="990011"/>
-                </a:solidFill>
-                <a:latin typeface="Times New Roman" pitchFamily="34" charset="0"/>
-                <a:ea typeface="Times New Roman" pitchFamily="34" charset="-122"/>
-                <a:cs typeface="Times New Roman" pitchFamily="34" charset="-120"/>
-              </a:rPr>
-              <a:t>1. Types, Aims and Reasons for Creation</a:t>
-            </a:r>
-            <a:endParaRPr lang="en-US" sz="3600" dirty="0"/>
-          </a:p>
-        </p:txBody>
-      </p:sp>
       <p:pic>
         <p:nvPicPr>
-          <p:cNvPr id="4" name="Image 0" descr="/home/claude/f4/img/v2/blocs_africa_big.png">    </p:cNvPr>
+          <p:cNvPr id="3" name="Image 0" descr="/home/claude/f4/img/minesec_sheet.png">    </p:cNvPr>
           <p:cNvPicPr>
             <a:picLocks noChangeAspect="1"/>
           </p:cNvPicPr>
@@ -14464,8 +15037,8 @@
         </p:blipFill>
         <p:spPr>
           <a:xfrm>
-            <a:off x="1825600" y="1783080"/>
-            <a:ext cx="8540496" cy="4270248"/>
+            <a:off x="0" y="658368"/>
+            <a:ext cx="2468880" cy="5833872"/>
           </a:xfrm>
           <a:prstGeom prst="rect">
             <a:avLst/>
@@ -14474,14 +15047,14 @@
       </p:pic>
       <p:sp>
         <p:nvSpPr>
-          <p:cNvPr id="5" name="Text 2"/>
+          <p:cNvPr id="4" name="Text 1"/>
           <p:cNvSpPr/>
           <p:nvPr/>
         </p:nvSpPr>
         <p:spPr>
           <a:xfrm>
-            <a:off x="457200" y="6089904"/>
-            <a:ext cx="11277295" cy="347472"/>
+            <a:off x="2697480" y="1005840"/>
+            <a:ext cx="9174175" cy="731520"/>
           </a:xfrm>
           <a:prstGeom prst="rect">
             <a:avLst/>
@@ -14490,24 +15063,181 @@
           <a:ln/>
         </p:spPr>
         <p:txBody>
-          <a:bodyPr wrap="square" lIns="0" tIns="0" rIns="0" bIns="0" rtlCol="0" anchor="ctr"/>
+          <a:bodyPr wrap="square" lIns="0" tIns="0" rIns="0" bIns="0" rtlCol="0" anchor="ctr">
+            <a:normAutofit/>
+          </a:bodyPr>
           <a:lstStyle/>
           <a:p>
             <a:pPr algn="ctr" indent="0" marL="0">
               <a:buNone/>
             </a:pPr>
             <a:r>
-              <a:rPr lang="en-US" sz="1800" i="1" dirty="0">
-                <a:solidFill>
-                  <a:srgbClr val="555555"/>
+              <a:rPr lang="en-US" sz="3600" b="1" dirty="0">
+                <a:solidFill>
+                  <a:srgbClr val="990011"/>
                 </a:solidFill>
                 <a:latin typeface="Times New Roman" pitchFamily="34" charset="0"/>
                 <a:ea typeface="Times New Roman" pitchFamily="34" charset="-122"/>
                 <a:cs typeface="Times New Roman" pitchFamily="34" charset="-120"/>
               </a:rPr>
-              <a:t>Illustration: trade blocs in Africa</a:t>
-            </a:r>
-            <a:endParaRPr lang="en-US" sz="1800" dirty="0"/>
+              <a:t>1. Types, Aims and Reasons for Creation</a:t>
+            </a:r>
+            <a:endParaRPr lang="en-US" sz="3600" dirty="0"/>
+          </a:p>
+        </p:txBody>
+      </p:sp>
+      <p:sp>
+        <p:nvSpPr>
+          <p:cNvPr id="5" name="Text 2"/>
+          <p:cNvSpPr/>
+          <p:nvPr/>
+        </p:nvSpPr>
+        <p:spPr>
+          <a:xfrm>
+            <a:off x="2697480" y="1737360"/>
+            <a:ext cx="9174175" cy="457200"/>
+          </a:xfrm>
+          <a:prstGeom prst="rect">
+            <a:avLst/>
+          </a:prstGeom>
+          <a:noFill/>
+          <a:ln/>
+        </p:spPr>
+        <p:txBody>
+          <a:bodyPr wrap="square" lIns="0" tIns="0" rIns="0" bIns="0" rtlCol="0" anchor="ctr"/>
+          <a:lstStyle/>
+          <a:p>
+            <a:pPr algn="l" indent="0" marL="0">
+              <a:buNone/>
+            </a:pPr>
+            <a:r>
+              <a:rPr lang="en-US" sz="3200" b="1" dirty="0">
+                <a:solidFill>
+                  <a:srgbClr val="990011"/>
+                </a:solidFill>
+                <a:latin typeface="Times New Roman" pitchFamily="34" charset="0"/>
+                <a:ea typeface="Times New Roman" pitchFamily="34" charset="-122"/>
+                <a:cs typeface="Times New Roman" pitchFamily="34" charset="-120"/>
+              </a:rPr>
+              <a:t>B) Examples, Aims and Reasons</a:t>
+            </a:r>
+            <a:endParaRPr lang="en-US" sz="3200" dirty="0"/>
+          </a:p>
+        </p:txBody>
+      </p:sp>
+      <p:sp>
+        <p:nvSpPr>
+          <p:cNvPr id="6" name="Text 3"/>
+          <p:cNvSpPr/>
+          <p:nvPr/>
+        </p:nvSpPr>
+        <p:spPr>
+          <a:xfrm>
+            <a:off x="2697480" y="2240280"/>
+            <a:ext cx="9174175" cy="4206240"/>
+          </a:xfrm>
+          <a:prstGeom prst="rect">
+            <a:avLst/>
+          </a:prstGeom>
+          <a:noFill/>
+          <a:ln/>
+        </p:spPr>
+        <p:txBody>
+          <a:bodyPr wrap="square" lIns="0" tIns="0" rIns="0" bIns="0" rtlCol="0" anchor="t"/>
+          <a:lstStyle/>
+          <a:p>
+            <a:pPr algn="l" indent="0" marL="0">
+              <a:spcAft>
+                <a:spcPts val="800"/>
+              </a:spcAft>
+              <a:buNone/>
+            </a:pPr>
+            <a:r>
+              <a:rPr lang="en-US" sz="4000" i="1" dirty="0">
+                <a:solidFill>
+                  <a:srgbClr val="111111"/>
+                </a:solidFill>
+                <a:latin typeface="Times New Roman" pitchFamily="34" charset="0"/>
+                <a:ea typeface="Times New Roman" pitchFamily="34" charset="-122"/>
+                <a:cs typeface="Times New Roman" pitchFamily="34" charset="-120"/>
+              </a:rPr>
+              <a:t>Trade blocs are created as follows:</a:t>
+            </a:r>
+            <a:endParaRPr lang="en-US" sz="4000" dirty="0"/>
+          </a:p>
+          <a:p>
+            <a:pPr algn="l" indent="0" marL="0">
+              <a:spcAft>
+                <a:spcPts val="800"/>
+              </a:spcAft>
+              <a:buNone/>
+            </a:pPr>
+            <a:r>
+              <a:rPr lang="en-US" sz="4000" b="1" dirty="0">
+                <a:solidFill>
+                  <a:srgbClr val="111111"/>
+                </a:solidFill>
+                <a:latin typeface="Times New Roman" pitchFamily="34" charset="0"/>
+                <a:ea typeface="Times New Roman" pitchFamily="34" charset="-122"/>
+                <a:cs typeface="Times New Roman" pitchFamily="34" charset="-120"/>
+              </a:rPr>
+              <a:t>Examples: </a:t>
+            </a:r>
+            <a:pPr algn="l" indent="0" marL="0">
+              <a:spcAft>
+                <a:spcPts val="800"/>
+              </a:spcAft>
+              <a:buNone/>
+            </a:pPr>
+            <a:r>
+              <a:rPr lang="en-US" sz="4000" dirty="0">
+                <a:solidFill>
+                  <a:srgbClr val="111111"/>
+                </a:solidFill>
+                <a:latin typeface="Times New Roman" pitchFamily="34" charset="0"/>
+                <a:ea typeface="Times New Roman" pitchFamily="34" charset="-122"/>
+                <a:cs typeface="Times New Roman" pitchFamily="34" charset="-120"/>
+              </a:rPr>
+              <a:t>CEMAC, ECOWAS, the European Union, ASEAN and LAFTA are trade blocs.</a:t>
+            </a:r>
+            <a:endParaRPr lang="en-US" sz="4000" dirty="0"/>
+          </a:p>
+          <a:p>
+            <a:pPr algn="l" indent="0" marL="0">
+              <a:spcAft>
+                <a:spcPts val="800"/>
+              </a:spcAft>
+              <a:buNone/>
+            </a:pPr>
+            <a:r>
+              <a:rPr lang="en-US" sz="4000" b="1" dirty="0">
+                <a:solidFill>
+                  <a:srgbClr val="111111"/>
+                </a:solidFill>
+                <a:latin typeface="Times New Roman" pitchFamily="34" charset="0"/>
+                <a:ea typeface="Times New Roman" pitchFamily="34" charset="-122"/>
+                <a:cs typeface="Times New Roman" pitchFamily="34" charset="-120"/>
+              </a:rPr>
+              <a:t>Aims: </a:t>
+            </a:r>
+            <a:pPr algn="l" indent="0" marL="0">
+              <a:spcAft>
+                <a:spcPts val="800"/>
+              </a:spcAft>
+              <a:buNone/>
+            </a:pPr>
+            <a:r>
+              <a:rPr lang="en-US" sz="4000" dirty="0">
+                <a:solidFill>
+                  <a:srgbClr val="111111"/>
+                </a:solidFill>
+                <a:latin typeface="Times New Roman" pitchFamily="34" charset="0"/>
+                <a:ea typeface="Times New Roman" pitchFamily="34" charset="-122"/>
+                <a:cs typeface="Times New Roman" pitchFamily="34" charset="-120"/>
+              </a:rPr>
+              <a:t>They increase trade, attract investment and strengthen members in world markets.</a:t>
+            </a:r>
+            <a:endParaRPr lang="en-US" sz="4000" dirty="0"/>
           </a:p>
         </p:txBody>
       </p:sp>
@@ -14640,7 +15370,7 @@
         <p:spPr>
           <a:xfrm>
             <a:off x="0" y="658368"/>
-            <a:ext cx="2468880" cy="5833872"/>
+            <a:ext cx="5120640" cy="5833872"/>
           </a:xfrm>
           <a:prstGeom prst="rect">
             <a:avLst/>
@@ -14655,8 +15385,8 @@
         </p:nvSpPr>
         <p:spPr>
           <a:xfrm>
-            <a:off x="2697480" y="1005840"/>
-            <a:ext cx="9174175" cy="731520"/>
+            <a:off x="5349240" y="1005840"/>
+            <a:ext cx="6522415" cy="731520"/>
           </a:xfrm>
           <a:prstGeom prst="rect">
             <a:avLst/>
@@ -14682,7 +15412,7 @@
                 <a:ea typeface="Times New Roman" pitchFamily="34" charset="-122"/>
                 <a:cs typeface="Times New Roman" pitchFamily="34" charset="-120"/>
               </a:rPr>
-              <a:t>2. Case Study: CEMAC</a:t>
+              <a:t>1. Types, Aims and Reasons for Creation</a:t>
             </a:r>
             <a:endParaRPr lang="en-US" sz="3600" dirty="0"/>
           </a:p>
@@ -14696,8 +15426,47 @@
         </p:nvSpPr>
         <p:spPr>
           <a:xfrm>
-            <a:off x="2697480" y="1783080"/>
-            <a:ext cx="9174175" cy="4663440"/>
+            <a:off x="5349240" y="1737360"/>
+            <a:ext cx="6522415" cy="457200"/>
+          </a:xfrm>
+          <a:prstGeom prst="rect">
+            <a:avLst/>
+          </a:prstGeom>
+          <a:noFill/>
+          <a:ln/>
+        </p:spPr>
+        <p:txBody>
+          <a:bodyPr wrap="square" lIns="0" tIns="0" rIns="0" bIns="0" rtlCol="0" anchor="ctr"/>
+          <a:lstStyle/>
+          <a:p>
+            <a:pPr algn="l" indent="0" marL="0">
+              <a:buNone/>
+            </a:pPr>
+            <a:r>
+              <a:rPr lang="en-US" sz="2500" b="1" dirty="0">
+                <a:solidFill>
+                  <a:srgbClr val="990011"/>
+                </a:solidFill>
+                <a:latin typeface="Times New Roman" pitchFamily="34" charset="0"/>
+                <a:ea typeface="Times New Roman" pitchFamily="34" charset="-122"/>
+                <a:cs typeface="Times New Roman" pitchFamily="34" charset="-120"/>
+              </a:rPr>
+              <a:t>B) Examples, Aims and Reasons (continued)</a:t>
+            </a:r>
+            <a:endParaRPr lang="en-US" sz="2500" dirty="0"/>
+          </a:p>
+        </p:txBody>
+      </p:sp>
+      <p:sp>
+        <p:nvSpPr>
+          <p:cNvPr id="6" name="Text 3"/>
+          <p:cNvSpPr/>
+          <p:nvPr/>
+        </p:nvSpPr>
+        <p:spPr>
+          <a:xfrm>
+            <a:off x="5349240" y="2240280"/>
+            <a:ext cx="6522415" cy="4206240"/>
           </a:xfrm>
           <a:prstGeom prst="rect">
             <a:avLst/>
@@ -14716,7 +15485,7 @@
               <a:buNone/>
             </a:pPr>
             <a:r>
-              <a:rPr lang="en-US" sz="4000" i="1" dirty="0">
+              <a:rPr lang="en-US" sz="4000" b="1" dirty="0">
                 <a:solidFill>
                   <a:srgbClr val="111111"/>
                 </a:solidFill>
@@ -14724,11 +15493,8 @@
                 <a:ea typeface="Times New Roman" pitchFamily="34" charset="-122"/>
                 <a:cs typeface="Times New Roman" pitchFamily="34" charset="-120"/>
               </a:rPr>
-              <a:t>CEMAC is an example of a trade bloc in LICs:</a:t>
-            </a:r>
-            <a:endParaRPr lang="en-US" sz="4000" dirty="0"/>
-          </a:p>
-          <a:p>
+              <a:t>Reasons: </a:t>
+            </a:r>
             <a:pPr algn="l" indent="0" marL="0">
               <a:spcAft>
                 <a:spcPts val="800"/>
@@ -14736,7 +15502,7 @@
               <a:buNone/>
             </a:pPr>
             <a:r>
-              <a:rPr lang="en-US" sz="4000" b="1" dirty="0">
+              <a:rPr lang="en-US" sz="4000" dirty="0">
                 <a:solidFill>
                   <a:srgbClr val="111111"/>
                 </a:solidFill>
@@ -14744,61 +15510,7 @@
                 <a:ea typeface="Times New Roman" pitchFamily="34" charset="-122"/>
                 <a:cs typeface="Times New Roman" pitchFamily="34" charset="-120"/>
               </a:rPr>
-              <a:t>Members: </a:t>
-            </a:r>
-            <a:pPr algn="l" indent="0" marL="0">
-              <a:spcAft>
-                <a:spcPts val="800"/>
-              </a:spcAft>
-              <a:buNone/>
-            </a:pPr>
-            <a:r>
-              <a:rPr lang="en-US" sz="4000" dirty="0">
-                <a:solidFill>
-                  <a:srgbClr val="111111"/>
-                </a:solidFill>
-                <a:latin typeface="Times New Roman" pitchFamily="34" charset="0"/>
-                <a:ea typeface="Times New Roman" pitchFamily="34" charset="-122"/>
-                <a:cs typeface="Times New Roman" pitchFamily="34" charset="-120"/>
-              </a:rPr>
-              <a:t>Cameroon, Chad, Gabon, Congo, the Central African Republic and Equatorial Guinea are members.</a:t>
-            </a:r>
-            <a:endParaRPr lang="en-US" sz="4000" dirty="0"/>
-          </a:p>
-          <a:p>
-            <a:pPr algn="l" indent="0" marL="0">
-              <a:spcAft>
-                <a:spcPts val="800"/>
-              </a:spcAft>
-              <a:buNone/>
-            </a:pPr>
-            <a:r>
-              <a:rPr lang="en-US" sz="4000" b="1" dirty="0">
-                <a:solidFill>
-                  <a:srgbClr val="111111"/>
-                </a:solidFill>
-                <a:latin typeface="Times New Roman" pitchFamily="34" charset="0"/>
-                <a:ea typeface="Times New Roman" pitchFamily="34" charset="-122"/>
-                <a:cs typeface="Times New Roman" pitchFamily="34" charset="-120"/>
-              </a:rPr>
-              <a:t>Achievements: </a:t>
-            </a:r>
-            <a:pPr algn="l" indent="0" marL="0">
-              <a:spcAft>
-                <a:spcPts val="800"/>
-              </a:spcAft>
-              <a:buNone/>
-            </a:pPr>
-            <a:r>
-              <a:rPr lang="en-US" sz="4000" dirty="0">
-                <a:solidFill>
-                  <a:srgbClr val="111111"/>
-                </a:solidFill>
-                <a:latin typeface="Times New Roman" pitchFamily="34" charset="0"/>
-                <a:ea typeface="Times New Roman" pitchFamily="34" charset="-122"/>
-                <a:cs typeface="Times New Roman" pitchFamily="34" charset="-120"/>
-              </a:rPr>
-              <a:t>Members share the CFA franc and a common external tariff.</a:t>
+              <a:t>Small national markets and competition from big powers push countries to unite.</a:t>
             </a:r>
             <a:endParaRPr lang="en-US" sz="4000" dirty="0"/>
           </a:p>
@@ -15155,9 +15867,48 @@
           </a:p>
         </p:txBody>
       </p:sp>
+      <p:sp>
+        <p:nvSpPr>
+          <p:cNvPr id="3" name="Text 1"/>
+          <p:cNvSpPr/>
+          <p:nvPr/>
+        </p:nvSpPr>
+        <p:spPr>
+          <a:xfrm>
+            <a:off x="457200" y="1005840"/>
+            <a:ext cx="11277295" cy="731520"/>
+          </a:xfrm>
+          <a:prstGeom prst="rect">
+            <a:avLst/>
+          </a:prstGeom>
+          <a:noFill/>
+          <a:ln/>
+        </p:spPr>
+        <p:txBody>
+          <a:bodyPr wrap="square" lIns="0" tIns="0" rIns="0" bIns="0" rtlCol="0" anchor="ctr"/>
+          <a:lstStyle/>
+          <a:p>
+            <a:pPr algn="ctr" indent="0" marL="0">
+              <a:buNone/>
+            </a:pPr>
+            <a:r>
+              <a:rPr lang="en-US" sz="3600" b="1" dirty="0">
+                <a:solidFill>
+                  <a:srgbClr val="990011"/>
+                </a:solidFill>
+                <a:latin typeface="Times New Roman" pitchFamily="34" charset="0"/>
+                <a:ea typeface="Times New Roman" pitchFamily="34" charset="-122"/>
+                <a:cs typeface="Times New Roman" pitchFamily="34" charset="-120"/>
+              </a:rPr>
+              <a:t>1. Types, Aims and Reasons for Creation</a:t>
+            </a:r>
+            <a:endParaRPr lang="en-US" sz="3600" dirty="0"/>
+          </a:p>
+        </p:txBody>
+      </p:sp>
       <p:pic>
         <p:nvPicPr>
-          <p:cNvPr id="3" name="Image 0" descr="/home/claude/f4/img/minesec_sheet.png">    </p:cNvPr>
+          <p:cNvPr id="4" name="Image 0" descr="/home/claude/f4/img/v2/blocs_africa_big.png">    </p:cNvPr>
           <p:cNvPicPr>
             <a:picLocks noChangeAspect="1"/>
           </p:cNvPicPr>
@@ -15171,8 +15922,8 @@
         </p:blipFill>
         <p:spPr>
           <a:xfrm>
-            <a:off x="0" y="658368"/>
-            <a:ext cx="5120640" cy="5833872"/>
+            <a:off x="1825600" y="1783080"/>
+            <a:ext cx="8540496" cy="4270248"/>
           </a:xfrm>
           <a:prstGeom prst="rect">
             <a:avLst/>
@@ -15181,14 +15932,14 @@
       </p:pic>
       <p:sp>
         <p:nvSpPr>
-          <p:cNvPr id="4" name="Text 1"/>
+          <p:cNvPr id="5" name="Text 2"/>
           <p:cNvSpPr/>
           <p:nvPr/>
         </p:nvSpPr>
         <p:spPr>
           <a:xfrm>
-            <a:off x="5349240" y="1005840"/>
-            <a:ext cx="6522415" cy="731520"/>
+            <a:off x="457200" y="6089904"/>
+            <a:ext cx="11277295" cy="347472"/>
           </a:xfrm>
           <a:prstGeom prst="rect">
             <a:avLst/>
@@ -15197,85 +15948,24 @@
           <a:ln/>
         </p:spPr>
         <p:txBody>
-          <a:bodyPr wrap="square" lIns="0" tIns="0" rIns="0" bIns="0" rtlCol="0" anchor="ctr">
-            <a:normAutofit/>
-          </a:bodyPr>
+          <a:bodyPr wrap="square" lIns="0" tIns="0" rIns="0" bIns="0" rtlCol="0" anchor="ctr"/>
           <a:lstStyle/>
           <a:p>
             <a:pPr algn="ctr" indent="0" marL="0">
               <a:buNone/>
             </a:pPr>
             <a:r>
-              <a:rPr lang="en-US" sz="3600" b="1" dirty="0">
-                <a:solidFill>
-                  <a:srgbClr val="990011"/>
+              <a:rPr lang="en-US" sz="1800" i="1" dirty="0">
+                <a:solidFill>
+                  <a:srgbClr val="555555"/>
                 </a:solidFill>
                 <a:latin typeface="Times New Roman" pitchFamily="34" charset="0"/>
                 <a:ea typeface="Times New Roman" pitchFamily="34" charset="-122"/>
                 <a:cs typeface="Times New Roman" pitchFamily="34" charset="-120"/>
               </a:rPr>
-              <a:t>2. Case Study: CEMAC (continued)</a:t>
-            </a:r>
-            <a:endParaRPr lang="en-US" sz="3600" dirty="0"/>
-          </a:p>
-        </p:txBody>
-      </p:sp>
-      <p:sp>
-        <p:nvSpPr>
-          <p:cNvPr id="5" name="Text 2"/>
-          <p:cNvSpPr/>
-          <p:nvPr/>
-        </p:nvSpPr>
-        <p:spPr>
-          <a:xfrm>
-            <a:off x="5349240" y="1783080"/>
-            <a:ext cx="6522415" cy="4663440"/>
-          </a:xfrm>
-          <a:prstGeom prst="rect">
-            <a:avLst/>
-          </a:prstGeom>
-          <a:noFill/>
-          <a:ln/>
-        </p:spPr>
-        <p:txBody>
-          <a:bodyPr wrap="square" lIns="0" tIns="0" rIns="0" bIns="0" rtlCol="0" anchor="t"/>
-          <a:lstStyle/>
-          <a:p>
-            <a:pPr algn="l" indent="0" marL="0">
-              <a:spcAft>
-                <a:spcPts val="800"/>
-              </a:spcAft>
-              <a:buNone/>
-            </a:pPr>
-            <a:r>
-              <a:rPr lang="en-US" sz="4000" b="1" dirty="0">
-                <a:solidFill>
-                  <a:srgbClr val="111111"/>
-                </a:solidFill>
-                <a:latin typeface="Times New Roman" pitchFamily="34" charset="0"/>
-                <a:ea typeface="Times New Roman" pitchFamily="34" charset="-122"/>
-                <a:cs typeface="Times New Roman" pitchFamily="34" charset="-120"/>
-              </a:rPr>
-              <a:t>Problems: </a:t>
-            </a:r>
-            <a:pPr algn="l" indent="0" marL="0">
-              <a:spcAft>
-                <a:spcPts val="800"/>
-              </a:spcAft>
-              <a:buNone/>
-            </a:pPr>
-            <a:r>
-              <a:rPr lang="en-US" sz="4000" dirty="0">
-                <a:solidFill>
-                  <a:srgbClr val="111111"/>
-                </a:solidFill>
-                <a:latin typeface="Times New Roman" pitchFamily="34" charset="0"/>
-                <a:ea typeface="Times New Roman" pitchFamily="34" charset="-122"/>
-                <a:cs typeface="Times New Roman" pitchFamily="34" charset="-120"/>
-              </a:rPr>
-              <a:t>Poor roads, road checks and similar exports limit trade among members.</a:t>
-            </a:r>
-            <a:endParaRPr lang="en-US" sz="4000" dirty="0"/>
+              <a:t>Illustration: trade blocs in Africa</a:t>
+            </a:r>
+            <a:endParaRPr lang="en-US" sz="1800" dirty="0"/>
           </a:p>
         </p:txBody>
       </p:sp>
@@ -15408,7 +16098,7 @@
         <p:spPr>
           <a:xfrm>
             <a:off x="0" y="658368"/>
-            <a:ext cx="2468880" cy="5833872"/>
+            <a:ext cx="3840480" cy="5833872"/>
           </a:xfrm>
           <a:prstGeom prst="rect">
             <a:avLst/>
@@ -15423,8 +16113,8 @@
         </p:nvSpPr>
         <p:spPr>
           <a:xfrm>
-            <a:off x="2697480" y="1005840"/>
-            <a:ext cx="9174175" cy="731520"/>
+            <a:off x="4069080" y="1005840"/>
+            <a:ext cx="7802575" cy="731520"/>
           </a:xfrm>
           <a:prstGeom prst="rect">
             <a:avLst/>
@@ -15450,7 +16140,7 @@
                 <a:ea typeface="Times New Roman" pitchFamily="34" charset="-122"/>
                 <a:cs typeface="Times New Roman" pitchFamily="34" charset="-120"/>
               </a:rPr>
-              <a:t>3. Advantages and Disadvantages</a:t>
+              <a:t>2. Case Study: CEMAC</a:t>
             </a:r>
             <a:endParaRPr lang="en-US" sz="3600" dirty="0"/>
           </a:p>
@@ -15464,8 +16154,47 @@
         </p:nvSpPr>
         <p:spPr>
           <a:xfrm>
-            <a:off x="2697480" y="1783080"/>
-            <a:ext cx="9174175" cy="4663440"/>
+            <a:off x="4069080" y="1737360"/>
+            <a:ext cx="7802575" cy="457200"/>
+          </a:xfrm>
+          <a:prstGeom prst="rect">
+            <a:avLst/>
+          </a:prstGeom>
+          <a:noFill/>
+          <a:ln/>
+        </p:spPr>
+        <p:txBody>
+          <a:bodyPr wrap="square" lIns="0" tIns="0" rIns="0" bIns="0" rtlCol="0" anchor="ctr"/>
+          <a:lstStyle/>
+          <a:p>
+            <a:pPr algn="l" indent="0" marL="0">
+              <a:buNone/>
+            </a:pPr>
+            <a:r>
+              <a:rPr lang="en-US" sz="3200" b="1" dirty="0">
+                <a:solidFill>
+                  <a:srgbClr val="990011"/>
+                </a:solidFill>
+                <a:latin typeface="Times New Roman" pitchFamily="34" charset="0"/>
+                <a:ea typeface="Times New Roman" pitchFamily="34" charset="-122"/>
+                <a:cs typeface="Times New Roman" pitchFamily="34" charset="-120"/>
+              </a:rPr>
+              <a:t>A) Members and Achievements</a:t>
+            </a:r>
+            <a:endParaRPr lang="en-US" sz="3200" dirty="0"/>
+          </a:p>
+        </p:txBody>
+      </p:sp>
+      <p:sp>
+        <p:nvSpPr>
+          <p:cNvPr id="6" name="Text 3"/>
+          <p:cNvSpPr/>
+          <p:nvPr/>
+        </p:nvSpPr>
+        <p:spPr>
+          <a:xfrm>
+            <a:off x="4069080" y="2240280"/>
+            <a:ext cx="7802575" cy="4206240"/>
           </a:xfrm>
           <a:prstGeom prst="rect">
             <a:avLst/>
@@ -15492,7 +16221,7 @@
                 <a:ea typeface="Times New Roman" pitchFamily="34" charset="-122"/>
                 <a:cs typeface="Times New Roman" pitchFamily="34" charset="-120"/>
               </a:rPr>
-              <a:t>Trade blocs have the following advantages and disadvantages:</a:t>
+              <a:t>CEMAC has the following members and achievements:</a:t>
             </a:r>
             <a:endParaRPr lang="en-US" sz="4000" dirty="0"/>
           </a:p>
@@ -15512,7 +16241,7 @@
                 <a:ea typeface="Times New Roman" pitchFamily="34" charset="-122"/>
                 <a:cs typeface="Times New Roman" pitchFamily="34" charset="-120"/>
               </a:rPr>
-              <a:t>Advantages: </a:t>
+              <a:t>Members: </a:t>
             </a:r>
             <a:pPr algn="l" indent="0" marL="0">
               <a:spcAft>
@@ -15529,44 +16258,7 @@
                 <a:ea typeface="Times New Roman" pitchFamily="34" charset="-122"/>
                 <a:cs typeface="Times New Roman" pitchFamily="34" charset="-120"/>
               </a:rPr>
-              <a:t>They give a larger market, more investment and free movement of people.</a:t>
-            </a:r>
-            <a:endParaRPr lang="en-US" sz="4000" dirty="0"/>
-          </a:p>
-          <a:p>
-            <a:pPr algn="l" indent="0" marL="0">
-              <a:spcAft>
-                <a:spcPts val="800"/>
-              </a:spcAft>
-              <a:buNone/>
-            </a:pPr>
-            <a:r>
-              <a:rPr lang="en-US" sz="4000" b="1" dirty="0">
-                <a:solidFill>
-                  <a:srgbClr val="111111"/>
-                </a:solidFill>
-                <a:latin typeface="Times New Roman" pitchFamily="34" charset="0"/>
-                <a:ea typeface="Times New Roman" pitchFamily="34" charset="-122"/>
-                <a:cs typeface="Times New Roman" pitchFamily="34" charset="-120"/>
-              </a:rPr>
-              <a:t>Disadvantages: </a:t>
-            </a:r>
-            <a:pPr algn="l" indent="0" marL="0">
-              <a:spcAft>
-                <a:spcPts val="800"/>
-              </a:spcAft>
-              <a:buNone/>
-            </a:pPr>
-            <a:r>
-              <a:rPr lang="en-US" sz="4000" dirty="0">
-                <a:solidFill>
-                  <a:srgbClr val="111111"/>
-                </a:solidFill>
-                <a:latin typeface="Times New Roman" pitchFamily="34" charset="0"/>
-                <a:ea typeface="Times New Roman" pitchFamily="34" charset="-122"/>
-                <a:cs typeface="Times New Roman" pitchFamily="34" charset="-120"/>
-              </a:rPr>
-              <a:t>Weak members may lose customs revenue and local industries.</a:t>
+              <a:t>Cameroon, Chad, Gabon, Congo, the Central African Republic and Equatorial Guinea are members.</a:t>
             </a:r>
             <a:endParaRPr lang="en-US" sz="4000" dirty="0"/>
           </a:p>
@@ -15678,7 +16370,7 @@
                 <a:ea typeface="Calibri" pitchFamily="34" charset="-122"/>
                 <a:cs typeface="Calibri" pitchFamily="34" charset="-120"/>
               </a:rPr>
-              <a:t>FORMATIVE EVALUATION</a:t>
+              <a:t>BOARD SUMMARY</a:t>
             </a:r>
             <a:endParaRPr lang="en-US" sz="1400" dirty="0"/>
           </a:p>
@@ -15743,7 +16435,7 @@
                 <a:ea typeface="Times New Roman" pitchFamily="34" charset="-122"/>
                 <a:cs typeface="Times New Roman" pitchFamily="34" charset="-120"/>
               </a:rPr>
-              <a:t>Evaluation 1</a:t>
+              <a:t>2. Case Study: CEMAC</a:t>
             </a:r>
             <a:endParaRPr lang="en-US" sz="3600" dirty="0"/>
           </a:p>
@@ -15757,8 +16449,47 @@
         </p:nvSpPr>
         <p:spPr>
           <a:xfrm>
-            <a:off x="5349240" y="1783080"/>
-            <a:ext cx="6522415" cy="4663440"/>
+            <a:off x="5349240" y="1737360"/>
+            <a:ext cx="6522415" cy="457200"/>
+          </a:xfrm>
+          <a:prstGeom prst="rect">
+            <a:avLst/>
+          </a:prstGeom>
+          <a:noFill/>
+          <a:ln/>
+        </p:spPr>
+        <p:txBody>
+          <a:bodyPr wrap="square" lIns="0" tIns="0" rIns="0" bIns="0" rtlCol="0" anchor="ctr"/>
+          <a:lstStyle/>
+          <a:p>
+            <a:pPr algn="l" indent="0" marL="0">
+              <a:buNone/>
+            </a:pPr>
+            <a:r>
+              <a:rPr lang="en-US" sz="2600" b="1" dirty="0">
+                <a:solidFill>
+                  <a:srgbClr val="990011"/>
+                </a:solidFill>
+                <a:latin typeface="Times New Roman" pitchFamily="34" charset="0"/>
+                <a:ea typeface="Times New Roman" pitchFamily="34" charset="-122"/>
+                <a:cs typeface="Times New Roman" pitchFamily="34" charset="-120"/>
+              </a:rPr>
+              <a:t>A) Members and Achievements (continued)</a:t>
+            </a:r>
+            <a:endParaRPr lang="en-US" sz="2600" dirty="0"/>
+          </a:p>
+        </p:txBody>
+      </p:sp>
+      <p:sp>
+        <p:nvSpPr>
+          <p:cNvPr id="6" name="Text 3"/>
+          <p:cNvSpPr/>
+          <p:nvPr/>
+        </p:nvSpPr>
+        <p:spPr>
+          <a:xfrm>
+            <a:off x="5349240" y="2240280"/>
+            <a:ext cx="6522415" cy="4206240"/>
           </a:xfrm>
           <a:prstGeom prst="rect">
             <a:avLst/>
@@ -15777,7 +16508,7 @@
               <a:buNone/>
             </a:pPr>
             <a:r>
-              <a:rPr lang="en-US" sz="4000" dirty="0">
+              <a:rPr lang="en-US" sz="4000" b="1" dirty="0">
                 <a:solidFill>
                   <a:srgbClr val="111111"/>
                 </a:solidFill>
@@ -15785,7 +16516,61 @@
                 <a:ea typeface="Times New Roman" pitchFamily="34" charset="-122"/>
                 <a:cs typeface="Times New Roman" pitchFamily="34" charset="-120"/>
               </a:rPr>
-              <a:t>Define a trade bloc.</a:t>
+              <a:t>Common currency: </a:t>
+            </a:r>
+            <a:pPr algn="l" indent="0" marL="0">
+              <a:spcAft>
+                <a:spcPts val="800"/>
+              </a:spcAft>
+              <a:buNone/>
+            </a:pPr>
+            <a:r>
+              <a:rPr lang="en-US" sz="4000" dirty="0">
+                <a:solidFill>
+                  <a:srgbClr val="111111"/>
+                </a:solidFill>
+                <a:latin typeface="Times New Roman" pitchFamily="34" charset="0"/>
+                <a:ea typeface="Times New Roman" pitchFamily="34" charset="-122"/>
+                <a:cs typeface="Times New Roman" pitchFamily="34" charset="-120"/>
+              </a:rPr>
+              <a:t>Members share the CFA franc.</a:t>
+            </a:r>
+            <a:endParaRPr lang="en-US" sz="4000" dirty="0"/>
+          </a:p>
+          <a:p>
+            <a:pPr algn="l" indent="0" marL="0">
+              <a:spcAft>
+                <a:spcPts val="800"/>
+              </a:spcAft>
+              <a:buNone/>
+            </a:pPr>
+            <a:r>
+              <a:rPr lang="en-US" sz="4000" b="1" dirty="0">
+                <a:solidFill>
+                  <a:srgbClr val="111111"/>
+                </a:solidFill>
+                <a:latin typeface="Times New Roman" pitchFamily="34" charset="0"/>
+                <a:ea typeface="Times New Roman" pitchFamily="34" charset="-122"/>
+                <a:cs typeface="Times New Roman" pitchFamily="34" charset="-120"/>
+              </a:rPr>
+              <a:t>Common external tariff: </a:t>
+            </a:r>
+            <a:pPr algn="l" indent="0" marL="0">
+              <a:spcAft>
+                <a:spcPts val="800"/>
+              </a:spcAft>
+              <a:buNone/>
+            </a:pPr>
+            <a:r>
+              <a:rPr lang="en-US" sz="4000" dirty="0">
+                <a:solidFill>
+                  <a:srgbClr val="111111"/>
+                </a:solidFill>
+                <a:latin typeface="Times New Roman" pitchFamily="34" charset="0"/>
+                <a:ea typeface="Times New Roman" pitchFamily="34" charset="-122"/>
+                <a:cs typeface="Times New Roman" pitchFamily="34" charset="-120"/>
+              </a:rPr>
+              <a:t>Members charge the same duties on imports.</a:t>
             </a:r>
             <a:endParaRPr lang="en-US" sz="4000" dirty="0"/>
           </a:p>
@@ -15897,7 +16682,7 @@
                 <a:ea typeface="Calibri" pitchFamily="34" charset="-122"/>
                 <a:cs typeface="Calibri" pitchFamily="34" charset="-120"/>
               </a:rPr>
-              <a:t>FORMATIVE EVALUATION</a:t>
+              <a:t>BOARD SUMMARY</a:t>
             </a:r>
             <a:endParaRPr lang="en-US" sz="1400" dirty="0"/>
           </a:p>
@@ -15962,7 +16747,7 @@
                 <a:ea typeface="Times New Roman" pitchFamily="34" charset="-122"/>
                 <a:cs typeface="Times New Roman" pitchFamily="34" charset="-120"/>
               </a:rPr>
-              <a:t>Expected Answer</a:t>
+              <a:t>2. Case Study: CEMAC</a:t>
             </a:r>
             <a:endParaRPr lang="en-US" sz="3600" dirty="0"/>
           </a:p>
@@ -15976,8 +16761,47 @@
         </p:nvSpPr>
         <p:spPr>
           <a:xfrm>
-            <a:off x="5349240" y="1783080"/>
-            <a:ext cx="6522415" cy="4663440"/>
+            <a:off x="5349240" y="1737360"/>
+            <a:ext cx="6522415" cy="457200"/>
+          </a:xfrm>
+          <a:prstGeom prst="rect">
+            <a:avLst/>
+          </a:prstGeom>
+          <a:noFill/>
+          <a:ln/>
+        </p:spPr>
+        <p:txBody>
+          <a:bodyPr wrap="square" lIns="0" tIns="0" rIns="0" bIns="0" rtlCol="0" anchor="ctr"/>
+          <a:lstStyle/>
+          <a:p>
+            <a:pPr algn="l" indent="0" marL="0">
+              <a:buNone/>
+            </a:pPr>
+            <a:r>
+              <a:rPr lang="en-US" sz="3200" b="1" dirty="0">
+                <a:solidFill>
+                  <a:srgbClr val="990011"/>
+                </a:solidFill>
+                <a:latin typeface="Times New Roman" pitchFamily="34" charset="0"/>
+                <a:ea typeface="Times New Roman" pitchFamily="34" charset="-122"/>
+                <a:cs typeface="Times New Roman" pitchFamily="34" charset="-120"/>
+              </a:rPr>
+              <a:t>B) Problems</a:t>
+            </a:r>
+            <a:endParaRPr lang="en-US" sz="3200" dirty="0"/>
+          </a:p>
+        </p:txBody>
+      </p:sp>
+      <p:sp>
+        <p:nvSpPr>
+          <p:cNvPr id="6" name="Text 3"/>
+          <p:cNvSpPr/>
+          <p:nvPr/>
+        </p:nvSpPr>
+        <p:spPr>
+          <a:xfrm>
+            <a:off x="5349240" y="2240280"/>
+            <a:ext cx="6522415" cy="4206240"/>
           </a:xfrm>
           <a:prstGeom prst="rect">
             <a:avLst/>
@@ -15996,7 +16820,7 @@
               <a:buNone/>
             </a:pPr>
             <a:r>
-              <a:rPr lang="en-US" sz="4000" dirty="0">
+              <a:rPr lang="en-US" sz="4000" i="1" dirty="0">
                 <a:solidFill>
                   <a:srgbClr val="111111"/>
                 </a:solidFill>
@@ -16004,7 +16828,81 @@
                 <a:ea typeface="Times New Roman" pitchFamily="34" charset="-122"/>
                 <a:cs typeface="Times New Roman" pitchFamily="34" charset="-120"/>
               </a:rPr>
-              <a:t>A group of countries that reduce trade barriers among themselves.</a:t>
+              <a:t>CEMAC faces the following problems:</a:t>
+            </a:r>
+            <a:endParaRPr lang="en-US" sz="4000" dirty="0"/>
+          </a:p>
+          <a:p>
+            <a:pPr algn="l" indent="0" marL="0">
+              <a:spcAft>
+                <a:spcPts val="800"/>
+              </a:spcAft>
+              <a:buNone/>
+            </a:pPr>
+            <a:r>
+              <a:rPr lang="en-US" sz="4000" b="1" dirty="0">
+                <a:solidFill>
+                  <a:srgbClr val="111111"/>
+                </a:solidFill>
+                <a:latin typeface="Times New Roman" pitchFamily="34" charset="0"/>
+                <a:ea typeface="Times New Roman" pitchFamily="34" charset="-122"/>
+                <a:cs typeface="Times New Roman" pitchFamily="34" charset="-120"/>
+              </a:rPr>
+              <a:t>Poor roads: </a:t>
+            </a:r>
+            <a:pPr algn="l" indent="0" marL="0">
+              <a:spcAft>
+                <a:spcPts val="800"/>
+              </a:spcAft>
+              <a:buNone/>
+            </a:pPr>
+            <a:r>
+              <a:rPr lang="en-US" sz="4000" dirty="0">
+                <a:solidFill>
+                  <a:srgbClr val="111111"/>
+                </a:solidFill>
+                <a:latin typeface="Times New Roman" pitchFamily="34" charset="0"/>
+                <a:ea typeface="Times New Roman" pitchFamily="34" charset="-122"/>
+                <a:cs typeface="Times New Roman" pitchFamily="34" charset="-120"/>
+              </a:rPr>
+              <a:t>Goods move slowly between members.</a:t>
+            </a:r>
+            <a:endParaRPr lang="en-US" sz="4000" dirty="0"/>
+          </a:p>
+          <a:p>
+            <a:pPr algn="l" indent="0" marL="0">
+              <a:spcAft>
+                <a:spcPts val="800"/>
+              </a:spcAft>
+              <a:buNone/>
+            </a:pPr>
+            <a:r>
+              <a:rPr lang="en-US" sz="4000" b="1" dirty="0">
+                <a:solidFill>
+                  <a:srgbClr val="111111"/>
+                </a:solidFill>
+                <a:latin typeface="Times New Roman" pitchFamily="34" charset="0"/>
+                <a:ea typeface="Times New Roman" pitchFamily="34" charset="-122"/>
+                <a:cs typeface="Times New Roman" pitchFamily="34" charset="-120"/>
+              </a:rPr>
+              <a:t>Road checks: </a:t>
+            </a:r>
+            <a:pPr algn="l" indent="0" marL="0">
+              <a:spcAft>
+                <a:spcPts val="800"/>
+              </a:spcAft>
+              <a:buNone/>
+            </a:pPr>
+            <a:r>
+              <a:rPr lang="en-US" sz="4000" dirty="0">
+                <a:solidFill>
+                  <a:srgbClr val="111111"/>
+                </a:solidFill>
+                <a:latin typeface="Times New Roman" pitchFamily="34" charset="0"/>
+                <a:ea typeface="Times New Roman" pitchFamily="34" charset="-122"/>
+                <a:cs typeface="Times New Roman" pitchFamily="34" charset="-120"/>
+              </a:rPr>
+              <a:t>Many checkpoints delay traders.</a:t>
             </a:r>
             <a:endParaRPr lang="en-US" sz="4000" dirty="0"/>
           </a:p>
@@ -16116,7 +17014,7 @@
                 <a:ea typeface="Calibri" pitchFamily="34" charset="-122"/>
                 <a:cs typeface="Calibri" pitchFamily="34" charset="-120"/>
               </a:rPr>
-              <a:t>FORMATIVE EVALUATION</a:t>
+              <a:t>BOARD SUMMARY</a:t>
             </a:r>
             <a:endParaRPr lang="en-US" sz="1400" dirty="0"/>
           </a:p>
@@ -16181,7 +17079,7 @@
                 <a:ea typeface="Times New Roman" pitchFamily="34" charset="-122"/>
                 <a:cs typeface="Times New Roman" pitchFamily="34" charset="-120"/>
               </a:rPr>
-              <a:t>Evaluation 2</a:t>
+              <a:t>2. Case Study: CEMAC</a:t>
             </a:r>
             <a:endParaRPr lang="en-US" sz="3600" dirty="0"/>
           </a:p>
@@ -16195,8 +17093,47 @@
         </p:nvSpPr>
         <p:spPr>
           <a:xfrm>
-            <a:off x="5349240" y="1783080"/>
-            <a:ext cx="6522415" cy="4663440"/>
+            <a:off x="5349240" y="1737360"/>
+            <a:ext cx="6522415" cy="457200"/>
+          </a:xfrm>
+          <a:prstGeom prst="rect">
+            <a:avLst/>
+          </a:prstGeom>
+          <a:noFill/>
+          <a:ln/>
+        </p:spPr>
+        <p:txBody>
+          <a:bodyPr wrap="square" lIns="0" tIns="0" rIns="0" bIns="0" rtlCol="0" anchor="ctr"/>
+          <a:lstStyle/>
+          <a:p>
+            <a:pPr algn="l" indent="0" marL="0">
+              <a:buNone/>
+            </a:pPr>
+            <a:r>
+              <a:rPr lang="en-US" sz="3200" b="1" dirty="0">
+                <a:solidFill>
+                  <a:srgbClr val="990011"/>
+                </a:solidFill>
+                <a:latin typeface="Times New Roman" pitchFamily="34" charset="0"/>
+                <a:ea typeface="Times New Roman" pitchFamily="34" charset="-122"/>
+                <a:cs typeface="Times New Roman" pitchFamily="34" charset="-120"/>
+              </a:rPr>
+              <a:t>B) Problems (continued)</a:t>
+            </a:r>
+            <a:endParaRPr lang="en-US" sz="3200" dirty="0"/>
+          </a:p>
+        </p:txBody>
+      </p:sp>
+      <p:sp>
+        <p:nvSpPr>
+          <p:cNvPr id="6" name="Text 3"/>
+          <p:cNvSpPr/>
+          <p:nvPr/>
+        </p:nvSpPr>
+        <p:spPr>
+          <a:xfrm>
+            <a:off x="5349240" y="2240280"/>
+            <a:ext cx="6522415" cy="4206240"/>
           </a:xfrm>
           <a:prstGeom prst="rect">
             <a:avLst/>
@@ -16215,7 +17152,7 @@
               <a:buNone/>
             </a:pPr>
             <a:r>
-              <a:rPr lang="en-US" sz="4000" dirty="0">
+              <a:rPr lang="en-US" sz="4000" b="1" dirty="0">
                 <a:solidFill>
                   <a:srgbClr val="111111"/>
                 </a:solidFill>
@@ -16223,7 +17160,24 @@
                 <a:ea typeface="Times New Roman" pitchFamily="34" charset="-122"/>
                 <a:cs typeface="Times New Roman" pitchFamily="34" charset="-120"/>
               </a:rPr>
-              <a:t>Name two trade blocs and one advantage.</a:t>
+              <a:t>Similar exports: </a:t>
+            </a:r>
+            <a:pPr algn="l" indent="0" marL="0">
+              <a:spcAft>
+                <a:spcPts val="800"/>
+              </a:spcAft>
+              <a:buNone/>
+            </a:pPr>
+            <a:r>
+              <a:rPr lang="en-US" sz="4000" dirty="0">
+                <a:solidFill>
+                  <a:srgbClr val="111111"/>
+                </a:solidFill>
+                <a:latin typeface="Times New Roman" pitchFamily="34" charset="0"/>
+                <a:ea typeface="Times New Roman" pitchFamily="34" charset="-122"/>
+                <a:cs typeface="Times New Roman" pitchFamily="34" charset="-120"/>
+              </a:rPr>
+              <a:t>Members sell the same products, so they trade little with each other.</a:t>
             </a:r>
             <a:endParaRPr lang="en-US" sz="4000" dirty="0"/>
           </a:p>
@@ -16335,7 +17289,7 @@
                 <a:ea typeface="Calibri" pitchFamily="34" charset="-122"/>
                 <a:cs typeface="Calibri" pitchFamily="34" charset="-120"/>
               </a:rPr>
-              <a:t>FORMATIVE EVALUATION</a:t>
+              <a:t>BOARD SUMMARY</a:t>
             </a:r>
             <a:endParaRPr lang="en-US" sz="1400" dirty="0"/>
           </a:p>
@@ -16358,7 +17312,7 @@
         <p:spPr>
           <a:xfrm>
             <a:off x="0" y="658368"/>
-            <a:ext cx="5120640" cy="5833872"/>
+            <a:ext cx="3840480" cy="5833872"/>
           </a:xfrm>
           <a:prstGeom prst="rect">
             <a:avLst/>
@@ -16373,8 +17327,8 @@
         </p:nvSpPr>
         <p:spPr>
           <a:xfrm>
-            <a:off x="5349240" y="1005840"/>
-            <a:ext cx="6522415" cy="731520"/>
+            <a:off x="4069080" y="1005840"/>
+            <a:ext cx="7802575" cy="731520"/>
           </a:xfrm>
           <a:prstGeom prst="rect">
             <a:avLst/>
@@ -16400,7 +17354,7 @@
                 <a:ea typeface="Times New Roman" pitchFamily="34" charset="-122"/>
                 <a:cs typeface="Times New Roman" pitchFamily="34" charset="-120"/>
               </a:rPr>
-              <a:t>Expected Answer</a:t>
+              <a:t>3. Advantages and Disadvantages</a:t>
             </a:r>
             <a:endParaRPr lang="en-US" sz="3600" dirty="0"/>
           </a:p>
@@ -16414,8 +17368,47 @@
         </p:nvSpPr>
         <p:spPr>
           <a:xfrm>
-            <a:off x="5349240" y="1783080"/>
-            <a:ext cx="6522415" cy="4663440"/>
+            <a:off x="4069080" y="1737360"/>
+            <a:ext cx="7802575" cy="457200"/>
+          </a:xfrm>
+          <a:prstGeom prst="rect">
+            <a:avLst/>
+          </a:prstGeom>
+          <a:noFill/>
+          <a:ln/>
+        </p:spPr>
+        <p:txBody>
+          <a:bodyPr wrap="square" lIns="0" tIns="0" rIns="0" bIns="0" rtlCol="0" anchor="ctr"/>
+          <a:lstStyle/>
+          <a:p>
+            <a:pPr algn="l" indent="0" marL="0">
+              <a:buNone/>
+            </a:pPr>
+            <a:r>
+              <a:rPr lang="en-US" sz="3200" b="1" dirty="0">
+                <a:solidFill>
+                  <a:srgbClr val="990011"/>
+                </a:solidFill>
+                <a:latin typeface="Times New Roman" pitchFamily="34" charset="0"/>
+                <a:ea typeface="Times New Roman" pitchFamily="34" charset="-122"/>
+                <a:cs typeface="Times New Roman" pitchFamily="34" charset="-120"/>
+              </a:rPr>
+              <a:t>A) Advantages</a:t>
+            </a:r>
+            <a:endParaRPr lang="en-US" sz="3200" dirty="0"/>
+          </a:p>
+        </p:txBody>
+      </p:sp>
+      <p:sp>
+        <p:nvSpPr>
+          <p:cNvPr id="6" name="Text 3"/>
+          <p:cNvSpPr/>
+          <p:nvPr/>
+        </p:nvSpPr>
+        <p:spPr>
+          <a:xfrm>
+            <a:off x="4069080" y="2240280"/>
+            <a:ext cx="7802575" cy="4206240"/>
           </a:xfrm>
           <a:prstGeom prst="rect">
             <a:avLst/>
@@ -16434,7 +17427,7 @@
               <a:buNone/>
             </a:pPr>
             <a:r>
-              <a:rPr lang="en-US" sz="4000" dirty="0">
+              <a:rPr lang="en-US" sz="4000" i="1" dirty="0">
                 <a:solidFill>
                   <a:srgbClr val="111111"/>
                 </a:solidFill>
@@ -16442,7 +17435,81 @@
                 <a:ea typeface="Times New Roman" pitchFamily="34" charset="-122"/>
                 <a:cs typeface="Times New Roman" pitchFamily="34" charset="-120"/>
               </a:rPr>
-              <a:t>CEMAC and ECOWAS; a larger market.</a:t>
+              <a:t>Trade blocs have the following advantages:</a:t>
+            </a:r>
+            <a:endParaRPr lang="en-US" sz="4000" dirty="0"/>
+          </a:p>
+          <a:p>
+            <a:pPr algn="l" indent="0" marL="0">
+              <a:spcAft>
+                <a:spcPts val="800"/>
+              </a:spcAft>
+              <a:buNone/>
+            </a:pPr>
+            <a:r>
+              <a:rPr lang="en-US" sz="4000" b="1" dirty="0">
+                <a:solidFill>
+                  <a:srgbClr val="111111"/>
+                </a:solidFill>
+                <a:latin typeface="Times New Roman" pitchFamily="34" charset="0"/>
+                <a:ea typeface="Times New Roman" pitchFamily="34" charset="-122"/>
+                <a:cs typeface="Times New Roman" pitchFamily="34" charset="-120"/>
+              </a:rPr>
+              <a:t>A larger market: </a:t>
+            </a:r>
+            <a:pPr algn="l" indent="0" marL="0">
+              <a:spcAft>
+                <a:spcPts val="800"/>
+              </a:spcAft>
+              <a:buNone/>
+            </a:pPr>
+            <a:r>
+              <a:rPr lang="en-US" sz="4000" dirty="0">
+                <a:solidFill>
+                  <a:srgbClr val="111111"/>
+                </a:solidFill>
+                <a:latin typeface="Times New Roman" pitchFamily="34" charset="0"/>
+                <a:ea typeface="Times New Roman" pitchFamily="34" charset="-122"/>
+                <a:cs typeface="Times New Roman" pitchFamily="34" charset="-120"/>
+              </a:rPr>
+              <a:t>Firms can sell to all member countries.</a:t>
+            </a:r>
+            <a:endParaRPr lang="en-US" sz="4000" dirty="0"/>
+          </a:p>
+          <a:p>
+            <a:pPr algn="l" indent="0" marL="0">
+              <a:spcAft>
+                <a:spcPts val="800"/>
+              </a:spcAft>
+              <a:buNone/>
+            </a:pPr>
+            <a:r>
+              <a:rPr lang="en-US" sz="4000" b="1" dirty="0">
+                <a:solidFill>
+                  <a:srgbClr val="111111"/>
+                </a:solidFill>
+                <a:latin typeface="Times New Roman" pitchFamily="34" charset="0"/>
+                <a:ea typeface="Times New Roman" pitchFamily="34" charset="-122"/>
+                <a:cs typeface="Times New Roman" pitchFamily="34" charset="-120"/>
+              </a:rPr>
+              <a:t>More investment: </a:t>
+            </a:r>
+            <a:pPr algn="l" indent="0" marL="0">
+              <a:spcAft>
+                <a:spcPts val="800"/>
+              </a:spcAft>
+              <a:buNone/>
+            </a:pPr>
+            <a:r>
+              <a:rPr lang="en-US" sz="4000" dirty="0">
+                <a:solidFill>
+                  <a:srgbClr val="111111"/>
+                </a:solidFill>
+                <a:latin typeface="Times New Roman" pitchFamily="34" charset="0"/>
+                <a:ea typeface="Times New Roman" pitchFamily="34" charset="-122"/>
+                <a:cs typeface="Times New Roman" pitchFamily="34" charset="-120"/>
+              </a:rPr>
+              <a:t>Investors are attracted by the big market.</a:t>
             </a:r>
             <a:endParaRPr lang="en-US" sz="4000" dirty="0"/>
           </a:p>
@@ -16554,7 +17621,7 @@
                 <a:ea typeface="Calibri" pitchFamily="34" charset="-122"/>
                 <a:cs typeface="Calibri" pitchFamily="34" charset="-120"/>
               </a:rPr>
-              <a:t>REMEDIATION</a:t>
+              <a:t>BOARD SUMMARY</a:t>
             </a:r>
             <a:endParaRPr lang="en-US" sz="1400" dirty="0"/>
           </a:p>
@@ -16577,7 +17644,7 @@
         <p:spPr>
           <a:xfrm>
             <a:off x="0" y="658368"/>
-            <a:ext cx="1463040" cy="5833872"/>
+            <a:ext cx="5120640" cy="5833872"/>
           </a:xfrm>
           <a:prstGeom prst="rect">
             <a:avLst/>
@@ -16592,8 +17659,8 @@
         </p:nvSpPr>
         <p:spPr>
           <a:xfrm>
-            <a:off x="1691640" y="1005840"/>
-            <a:ext cx="10180015" cy="731520"/>
+            <a:off x="5349240" y="1005840"/>
+            <a:ext cx="6522415" cy="731520"/>
           </a:xfrm>
           <a:prstGeom prst="rect">
             <a:avLst/>
@@ -16619,7 +17686,7 @@
                 <a:ea typeface="Times New Roman" pitchFamily="34" charset="-122"/>
                 <a:cs typeface="Times New Roman" pitchFamily="34" charset="-120"/>
               </a:rPr>
-              <a:t>Remediation</a:t>
+              <a:t>3. Advantages and Disadvantages</a:t>
             </a:r>
             <a:endParaRPr lang="en-US" sz="3600" dirty="0"/>
           </a:p>
@@ -16633,8 +17700,47 @@
         </p:nvSpPr>
         <p:spPr>
           <a:xfrm>
-            <a:off x="1691640" y="1783080"/>
-            <a:ext cx="10180015" cy="4663440"/>
+            <a:off x="5349240" y="1737360"/>
+            <a:ext cx="6522415" cy="457200"/>
+          </a:xfrm>
+          <a:prstGeom prst="rect">
+            <a:avLst/>
+          </a:prstGeom>
+          <a:noFill/>
+          <a:ln/>
+        </p:spPr>
+        <p:txBody>
+          <a:bodyPr wrap="square" lIns="0" tIns="0" rIns="0" bIns="0" rtlCol="0" anchor="ctr"/>
+          <a:lstStyle/>
+          <a:p>
+            <a:pPr algn="l" indent="0" marL="0">
+              <a:buNone/>
+            </a:pPr>
+            <a:r>
+              <a:rPr lang="en-US" sz="3200" b="1" dirty="0">
+                <a:solidFill>
+                  <a:srgbClr val="990011"/>
+                </a:solidFill>
+                <a:latin typeface="Times New Roman" pitchFamily="34" charset="0"/>
+                <a:ea typeface="Times New Roman" pitchFamily="34" charset="-122"/>
+                <a:cs typeface="Times New Roman" pitchFamily="34" charset="-120"/>
+              </a:rPr>
+              <a:t>A) Advantages (continued)</a:t>
+            </a:r>
+            <a:endParaRPr lang="en-US" sz="3200" dirty="0"/>
+          </a:p>
+        </p:txBody>
+      </p:sp>
+      <p:sp>
+        <p:nvSpPr>
+          <p:cNvPr id="6" name="Text 3"/>
+          <p:cNvSpPr/>
+          <p:nvPr/>
+        </p:nvSpPr>
+        <p:spPr>
+          <a:xfrm>
+            <a:off x="5349240" y="2240280"/>
+            <a:ext cx="6522415" cy="4206240"/>
           </a:xfrm>
           <a:prstGeom prst="rect">
             <a:avLst/>
@@ -16661,18 +17767,13 @@
                 <a:ea typeface="Times New Roman" pitchFamily="34" charset="-122"/>
                 <a:cs typeface="Times New Roman" pitchFamily="34" charset="-120"/>
               </a:rPr>
-              <a:t>Fill in the blanks:</a:t>
-            </a:r>
-            <a:endParaRPr lang="en-US" sz="4000" dirty="0"/>
-          </a:p>
-          <a:p>
-            <a:pPr algn="l" marL="342900" indent="-342900">
+              <a:t>Free movement of people: </a:t>
+            </a:r>
+            <a:pPr algn="l" indent="0" marL="0">
               <a:spcAft>
                 <a:spcPts val="800"/>
               </a:spcAft>
-              <a:buSzPct val="100000"/>
-              <a:buFont typeface="+mj-lt"/>
-              <a:buAutoNum type="arabicPeriod" startAt="1"/>
+              <a:buNone/>
             </a:pPr>
             <a:r>
               <a:rPr lang="en-US" sz="4000" dirty="0">
@@ -16683,51 +17784,7 @@
                 <a:ea typeface="Times New Roman" pitchFamily="34" charset="-122"/>
                 <a:cs typeface="Times New Roman" pitchFamily="34" charset="-120"/>
               </a:rPr>
-              <a:t>Cameroon belongs to the trade bloc ______.</a:t>
-            </a:r>
-            <a:endParaRPr lang="en-US" sz="4000" dirty="0"/>
-          </a:p>
-          <a:p>
-            <a:pPr algn="l" marL="342900" indent="-342900">
-              <a:spcAft>
-                <a:spcPts val="800"/>
-              </a:spcAft>
-              <a:buSzPct val="100000"/>
-              <a:buFont typeface="+mj-lt"/>
-              <a:buAutoNum type="arabicPeriod" startAt="1"/>
-            </a:pPr>
-            <a:r>
-              <a:rPr lang="en-US" sz="4000" dirty="0">
-                <a:solidFill>
-                  <a:srgbClr val="111111"/>
-                </a:solidFill>
-                <a:latin typeface="Times New Roman" pitchFamily="34" charset="0"/>
-                <a:ea typeface="Times New Roman" pitchFamily="34" charset="-122"/>
-                <a:cs typeface="Times New Roman" pitchFamily="34" charset="-120"/>
-              </a:rPr>
-              <a:t>The trade bloc of West Africa is ______.</a:t>
-            </a:r>
-            <a:endParaRPr lang="en-US" sz="4000" dirty="0"/>
-          </a:p>
-          <a:p>
-            <a:pPr algn="l" marL="342900" indent="-342900">
-              <a:spcAft>
-                <a:spcPts val="800"/>
-              </a:spcAft>
-              <a:buSzPct val="100000"/>
-              <a:buFont typeface="+mj-lt"/>
-              <a:buAutoNum type="arabicPeriod" startAt="1"/>
-            </a:pPr>
-            <a:r>
-              <a:rPr lang="en-US" sz="4000" dirty="0">
-                <a:solidFill>
-                  <a:srgbClr val="111111"/>
-                </a:solidFill>
-                <a:latin typeface="Times New Roman" pitchFamily="34" charset="0"/>
-                <a:ea typeface="Times New Roman" pitchFamily="34" charset="-122"/>
-                <a:cs typeface="Times New Roman" pitchFamily="34" charset="-120"/>
-              </a:rPr>
-              <a:t>The trade bloc of South-East Asia is ______.</a:t>
+              <a:t>Citizens travel and work more easily.</a:t>
             </a:r>
             <a:endParaRPr lang="en-US" sz="4000" dirty="0"/>
           </a:p>
@@ -16839,7 +17896,7 @@
                 <a:ea typeface="Calibri" pitchFamily="34" charset="-122"/>
                 <a:cs typeface="Calibri" pitchFamily="34" charset="-120"/>
               </a:rPr>
-              <a:t>HOMEWORK</a:t>
+              <a:t>BOARD SUMMARY</a:t>
             </a:r>
             <a:endParaRPr lang="en-US" sz="1400" dirty="0"/>
           </a:p>
@@ -16862,7 +17919,7 @@
         <p:spPr>
           <a:xfrm>
             <a:off x="0" y="658368"/>
-            <a:ext cx="5120640" cy="5833872"/>
+            <a:ext cx="2468880" cy="5833872"/>
           </a:xfrm>
           <a:prstGeom prst="rect">
             <a:avLst/>
@@ -16877,8 +17934,8 @@
         </p:nvSpPr>
         <p:spPr>
           <a:xfrm>
-            <a:off x="5349240" y="1005840"/>
-            <a:ext cx="6522415" cy="731520"/>
+            <a:off x="2697480" y="1005840"/>
+            <a:ext cx="9174175" cy="731520"/>
           </a:xfrm>
           <a:prstGeom prst="rect">
             <a:avLst/>
@@ -16904,7 +17961,7 @@
                 <a:ea typeface="Times New Roman" pitchFamily="34" charset="-122"/>
                 <a:cs typeface="Times New Roman" pitchFamily="34" charset="-120"/>
               </a:rPr>
-              <a:t>Homework</a:t>
+              <a:t>3. Advantages and Disadvantages</a:t>
             </a:r>
             <a:endParaRPr lang="en-US" sz="3600" dirty="0"/>
           </a:p>
@@ -16918,8 +17975,47 @@
         </p:nvSpPr>
         <p:spPr>
           <a:xfrm>
-            <a:off x="5349240" y="1783080"/>
-            <a:ext cx="6522415" cy="4663440"/>
+            <a:off x="2697480" y="1737360"/>
+            <a:ext cx="9174175" cy="457200"/>
+          </a:xfrm>
+          <a:prstGeom prst="rect">
+            <a:avLst/>
+          </a:prstGeom>
+          <a:noFill/>
+          <a:ln/>
+        </p:spPr>
+        <p:txBody>
+          <a:bodyPr wrap="square" lIns="0" tIns="0" rIns="0" bIns="0" rtlCol="0" anchor="ctr"/>
+          <a:lstStyle/>
+          <a:p>
+            <a:pPr algn="l" indent="0" marL="0">
+              <a:buNone/>
+            </a:pPr>
+            <a:r>
+              <a:rPr lang="en-US" sz="3200" b="1" dirty="0">
+                <a:solidFill>
+                  <a:srgbClr val="990011"/>
+                </a:solidFill>
+                <a:latin typeface="Times New Roman" pitchFamily="34" charset="0"/>
+                <a:ea typeface="Times New Roman" pitchFamily="34" charset="-122"/>
+                <a:cs typeface="Times New Roman" pitchFamily="34" charset="-120"/>
+              </a:rPr>
+              <a:t>B) Disadvantages</a:t>
+            </a:r>
+            <a:endParaRPr lang="en-US" sz="3200" dirty="0"/>
+          </a:p>
+        </p:txBody>
+      </p:sp>
+      <p:sp>
+        <p:nvSpPr>
+          <p:cNvPr id="6" name="Text 3"/>
+          <p:cNvSpPr/>
+          <p:nvPr/>
+        </p:nvSpPr>
+        <p:spPr>
+          <a:xfrm>
+            <a:off x="2697480" y="2240280"/>
+            <a:ext cx="9174175" cy="4206240"/>
           </a:xfrm>
           <a:prstGeom prst="rect">
             <a:avLst/>
@@ -16938,7 +18034,7 @@
               <a:buNone/>
             </a:pPr>
             <a:r>
-              <a:rPr lang="en-US" sz="4000" dirty="0">
+              <a:rPr lang="en-US" sz="4000" i="1" dirty="0">
                 <a:solidFill>
                   <a:srgbClr val="111111"/>
                 </a:solidFill>
@@ -16946,7 +18042,81 @@
                 <a:ea typeface="Times New Roman" pitchFamily="34" charset="-122"/>
                 <a:cs typeface="Times New Roman" pitchFamily="34" charset="-120"/>
               </a:rPr>
-              <a:t>Draw a sketch map of the CEMAC member states and name their capitals.</a:t>
+              <a:t>Trade blocs have the following disadvantages:</a:t>
+            </a:r>
+            <a:endParaRPr lang="en-US" sz="4000" dirty="0"/>
+          </a:p>
+          <a:p>
+            <a:pPr algn="l" indent="0" marL="0">
+              <a:spcAft>
+                <a:spcPts val="800"/>
+              </a:spcAft>
+              <a:buNone/>
+            </a:pPr>
+            <a:r>
+              <a:rPr lang="en-US" sz="4000" b="1" dirty="0">
+                <a:solidFill>
+                  <a:srgbClr val="111111"/>
+                </a:solidFill>
+                <a:latin typeface="Times New Roman" pitchFamily="34" charset="0"/>
+                <a:ea typeface="Times New Roman" pitchFamily="34" charset="-122"/>
+                <a:cs typeface="Times New Roman" pitchFamily="34" charset="-120"/>
+              </a:rPr>
+              <a:t>Loss of customs revenue: </a:t>
+            </a:r>
+            <a:pPr algn="l" indent="0" marL="0">
+              <a:spcAft>
+                <a:spcPts val="800"/>
+              </a:spcAft>
+              <a:buNone/>
+            </a:pPr>
+            <a:r>
+              <a:rPr lang="en-US" sz="4000" dirty="0">
+                <a:solidFill>
+                  <a:srgbClr val="111111"/>
+                </a:solidFill>
+                <a:latin typeface="Times New Roman" pitchFamily="34" charset="0"/>
+                <a:ea typeface="Times New Roman" pitchFamily="34" charset="-122"/>
+                <a:cs typeface="Times New Roman" pitchFamily="34" charset="-120"/>
+              </a:rPr>
+              <a:t>Weak members collect less money at borders.</a:t>
+            </a:r>
+            <a:endParaRPr lang="en-US" sz="4000" dirty="0"/>
+          </a:p>
+          <a:p>
+            <a:pPr algn="l" indent="0" marL="0">
+              <a:spcAft>
+                <a:spcPts val="800"/>
+              </a:spcAft>
+              <a:buNone/>
+            </a:pPr>
+            <a:r>
+              <a:rPr lang="en-US" sz="4000" b="1" dirty="0">
+                <a:solidFill>
+                  <a:srgbClr val="111111"/>
+                </a:solidFill>
+                <a:latin typeface="Times New Roman" pitchFamily="34" charset="0"/>
+                <a:ea typeface="Times New Roman" pitchFamily="34" charset="-122"/>
+                <a:cs typeface="Times New Roman" pitchFamily="34" charset="-120"/>
+              </a:rPr>
+              <a:t>Loss of local industries: </a:t>
+            </a:r>
+            <a:pPr algn="l" indent="0" marL="0">
+              <a:spcAft>
+                <a:spcPts val="800"/>
+              </a:spcAft>
+              <a:buNone/>
+            </a:pPr>
+            <a:r>
+              <a:rPr lang="en-US" sz="4000" dirty="0">
+                <a:solidFill>
+                  <a:srgbClr val="111111"/>
+                </a:solidFill>
+                <a:latin typeface="Times New Roman" pitchFamily="34" charset="0"/>
+                <a:ea typeface="Times New Roman" pitchFamily="34" charset="-122"/>
+                <a:cs typeface="Times New Roman" pitchFamily="34" charset="-120"/>
+              </a:rPr>
+              <a:t>Stronger firms of other members compete with them.</a:t>
             </a:r>
             <a:endParaRPr lang="en-US" sz="4000" dirty="0"/>
           </a:p>
@@ -17058,7 +18228,7 @@
                 <a:ea typeface="Calibri" pitchFamily="34" charset="-122"/>
                 <a:cs typeface="Calibri" pitchFamily="34" charset="-120"/>
               </a:rPr>
-              <a:t>NEXT LESSON</a:t>
+              <a:t>FORMATIVE EVALUATION</a:t>
             </a:r>
             <a:endParaRPr lang="en-US" sz="1400" dirty="0"/>
           </a:p>
@@ -17123,7 +18293,7 @@
                 <a:ea typeface="Times New Roman" pitchFamily="34" charset="-122"/>
                 <a:cs typeface="Times New Roman" pitchFamily="34" charset="-120"/>
               </a:rPr>
-              <a:t>Next Lesson</a:t>
+              <a:t>Evaluation 1</a:t>
             </a:r>
             <a:endParaRPr lang="en-US" sz="3600" dirty="0"/>
           </a:p>
@@ -17147,17 +18317,17 @@
           <a:ln/>
         </p:spPr>
         <p:txBody>
-          <a:bodyPr wrap="square" lIns="0" tIns="0" rIns="0" bIns="0" rtlCol="0" anchor="ctr"/>
-          <a:lstStyle/>
-          <a:p>
-            <a:pPr algn="ctr" indent="0" marL="0">
+          <a:bodyPr wrap="square" lIns="0" tIns="0" rIns="0" bIns="0" rtlCol="0" anchor="t"/>
+          <a:lstStyle/>
+          <a:p>
+            <a:pPr algn="l" indent="0" marL="0">
               <a:spcAft>
                 <a:spcPts val="800"/>
               </a:spcAft>
               <a:buNone/>
             </a:pPr>
             <a:r>
-              <a:rPr lang="en-US" sz="4000" b="1" dirty="0">
+              <a:rPr lang="en-US" sz="4000" dirty="0">
                 <a:solidFill>
                   <a:srgbClr val="111111"/>
                 </a:solidFill>
@@ -17165,27 +18335,7 @@
                 <a:ea typeface="Times New Roman" pitchFamily="34" charset="-122"/>
                 <a:cs typeface="Times New Roman" pitchFamily="34" charset="-120"/>
               </a:rPr>
-              <a:t>Our next lesson will be on:</a:t>
-            </a:r>
-            <a:endParaRPr lang="en-US" sz="4000" dirty="0"/>
-          </a:p>
-          <a:p>
-            <a:pPr algn="ctr" indent="0" marL="0">
-              <a:spcAft>
-                <a:spcPts val="800"/>
-              </a:spcAft>
-              <a:buNone/>
-            </a:pPr>
-            <a:r>
-              <a:rPr lang="en-US" sz="4000" b="1" dirty="0">
-                <a:solidFill>
-                  <a:srgbClr val="990011"/>
-                </a:solidFill>
-                <a:latin typeface="Times New Roman" pitchFamily="34" charset="0"/>
-                <a:ea typeface="Times New Roman" pitchFamily="34" charset="-122"/>
-                <a:cs typeface="Times New Roman" pitchFamily="34" charset="-120"/>
-              </a:rPr>
-              <a:t>Lesson 19: Tourism</a:t>
+              <a:t>Define a trade bloc.</a:t>
             </a:r>
             <a:endParaRPr lang="en-US" sz="4000" dirty="0"/>
           </a:p>
@@ -17297,22 +18447,46 @@
                 <a:ea typeface="Calibri" pitchFamily="34" charset="-122"/>
                 <a:cs typeface="Calibri" pitchFamily="34" charset="-120"/>
               </a:rPr>
-              <a:t>BILINGUAL GAME</a:t>
+              <a:t>FORMATIVE EVALUATION</a:t>
             </a:r>
             <a:endParaRPr lang="en-US" sz="1400" dirty="0"/>
           </a:p>
         </p:txBody>
       </p:sp>
-      <p:sp>
-        <p:nvSpPr>
-          <p:cNvPr id="3" name="Text 1"/>
+      <p:pic>
+        <p:nvPicPr>
+          <p:cNvPr id="3" name="Image 0" descr="/home/claude/f4/img/minesec_sheet.png">    </p:cNvPr>
+          <p:cNvPicPr>
+            <a:picLocks noChangeAspect="1"/>
+          </p:cNvPicPr>
+          <p:nvPr/>
+        </p:nvPicPr>
+        <p:blipFill>
+          <a:blip r:embed="rId1"/>
+          <a:stretch>
+            <a:fillRect/>
+          </a:stretch>
+        </p:blipFill>
+        <p:spPr>
+          <a:xfrm>
+            <a:off x="0" y="658368"/>
+            <a:ext cx="5120640" cy="5833872"/>
+          </a:xfrm>
+          <a:prstGeom prst="rect">
+            <a:avLst/>
+          </a:prstGeom>
+        </p:spPr>
+      </p:pic>
+      <p:sp>
+        <p:nvSpPr>
+          <p:cNvPr id="4" name="Text 1"/>
           <p:cNvSpPr/>
           <p:nvPr/>
         </p:nvSpPr>
         <p:spPr>
           <a:xfrm>
-            <a:off x="457200" y="1005840"/>
-            <a:ext cx="11277295" cy="731520"/>
+            <a:off x="5349240" y="1005840"/>
+            <a:ext cx="6522415" cy="731520"/>
           </a:xfrm>
           <a:prstGeom prst="rect">
             <a:avLst/>
@@ -17321,7 +18495,9 @@
           <a:ln/>
         </p:spPr>
         <p:txBody>
-          <a:bodyPr wrap="square" lIns="0" tIns="0" rIns="0" bIns="0" rtlCol="0" anchor="ctr"/>
+          <a:bodyPr wrap="square" lIns="0" tIns="0" rIns="0" bIns="0" rtlCol="0" anchor="ctr">
+            <a:normAutofit/>
+          </a:bodyPr>
           <a:lstStyle/>
           <a:p>
             <a:pPr algn="ctr" indent="0" marL="0">
@@ -17336,6 +18512,1599 @@
                 <a:ea typeface="Times New Roman" pitchFamily="34" charset="-122"/>
                 <a:cs typeface="Times New Roman" pitchFamily="34" charset="-120"/>
               </a:rPr>
+              <a:t>Expected Answer</a:t>
+            </a:r>
+            <a:endParaRPr lang="en-US" sz="3600" dirty="0"/>
+          </a:p>
+        </p:txBody>
+      </p:sp>
+      <p:sp>
+        <p:nvSpPr>
+          <p:cNvPr id="5" name="Text 2"/>
+          <p:cNvSpPr/>
+          <p:nvPr/>
+        </p:nvSpPr>
+        <p:spPr>
+          <a:xfrm>
+            <a:off x="5349240" y="1783080"/>
+            <a:ext cx="6522415" cy="4663440"/>
+          </a:xfrm>
+          <a:prstGeom prst="rect">
+            <a:avLst/>
+          </a:prstGeom>
+          <a:noFill/>
+          <a:ln/>
+        </p:spPr>
+        <p:txBody>
+          <a:bodyPr wrap="square" lIns="0" tIns="0" rIns="0" bIns="0" rtlCol="0" anchor="t"/>
+          <a:lstStyle/>
+          <a:p>
+            <a:pPr algn="l" indent="0" marL="0">
+              <a:spcAft>
+                <a:spcPts val="800"/>
+              </a:spcAft>
+              <a:buNone/>
+            </a:pPr>
+            <a:r>
+              <a:rPr lang="en-US" sz="4000" dirty="0">
+                <a:solidFill>
+                  <a:srgbClr val="111111"/>
+                </a:solidFill>
+                <a:latin typeface="Times New Roman" pitchFamily="34" charset="0"/>
+                <a:ea typeface="Times New Roman" pitchFamily="34" charset="-122"/>
+                <a:cs typeface="Times New Roman" pitchFamily="34" charset="-120"/>
+              </a:rPr>
+              <a:t>A group of countries that reduce trade barriers among themselves.</a:t>
+            </a:r>
+            <a:endParaRPr lang="en-US" sz="4000" dirty="0"/>
+          </a:p>
+        </p:txBody>
+      </p:sp>
+      <p:sp>
+        <p:nvSpPr>
+          <p:cNvPr id="25" name="Slide Number Placeholder 0"/>
+          <p:cNvSpPr>
+            <a:spLocks noGrp="1"/>
+          </p:cNvSpPr>
+          <p:nvPr>
+            <p:ph type="sldNum" sz="quarter" idx="4294967295"/>
+          </p:nvPr>
+        </p:nvSpPr>
+        <p:spPr>
+          <a:xfrm>
+            <a:off x="27432" y="91440"/>
+            <a:ext cx="585216" cy="475488"/>
+          </a:xfrm>
+          <a:prstGeom prst="rect">
+            <a:avLst/>
+          </a:prstGeom>
+          <a:extLst>
+            <a:ext uri="{C572A759-6A51-4108-AA02-DFA0A04FC94B}">
+              <ma14:wrappingTextBoxFlag xmlns:ma14="http://schemas.microsoft.com/office/mac/drawingml/2011/main" val="0"/>
+            </a:ext>
+          </a:extLst>
+        </p:spPr>
+        <p:txBody>
+          <a:bodyPr/>
+          <a:lstStyle>
+            <a:lvl1pPr>
+              <a:defRPr sz="2000">
+                <a:solidFill>
+                  <a:srgbClr val="FFFFFF"/>
+                </a:solidFill>
+                <a:latin typeface="Calibri"/>
+                <a:ea typeface="Calibri"/>
+                <a:cs typeface="Calibri"/>
+              </a:defRPr>
+            </a:lvl1pPr>
+          </a:lstStyle>
+          <a:p>
+            <a:pPr algn="ctr"/>
+            <a:fld id="{F7021451-1387-4CA6-816F-3879F97B5CBC}" type="slidenum">
+              <a:rPr b="1" lang="en-US"/>
+              <a:t>49</a:t>
+            </a:fld>
+            <a:endParaRPr lang="en-US"/>
+          </a:p>
+        </p:txBody>
+      </p:sp>
+    </p:spTree>
+  </p:cSld>
+  <p:clrMapOvr>
+    <a:masterClrMapping/>
+  </p:clrMapOvr>
+</p:sld>
+</file>
+
+<file path=ppt/slides/slide5.xml><?xml version="1.0" encoding="utf-8"?>
+<p:sld xmlns:a="http://schemas.openxmlformats.org/drawingml/2006/main" xmlns:r="http://schemas.openxmlformats.org/officeDocument/2006/relationships" xmlns:p="http://schemas.openxmlformats.org/presentationml/2006/main">
+  <p:cSld name="Slide 5">
+    <p:spTree>
+      <p:nvGrpSpPr>
+        <p:cNvPr id="1" name=""/>
+        <p:cNvGrpSpPr/>
+        <p:nvPr/>
+      </p:nvGrpSpPr>
+      <p:grpSpPr>
+        <a:xfrm>
+          <a:off x="0" y="0"/>
+          <a:ext cx="0" cy="0"/>
+          <a:chOff x="0" y="0"/>
+          <a:chExt cx="0" cy="0"/>
+        </a:xfrm>
+      </p:grpSpPr>
+      <p:sp>
+        <p:nvSpPr>
+          <p:cNvPr id="2" name="Text 0"/>
+          <p:cNvSpPr/>
+          <p:nvPr/>
+        </p:nvSpPr>
+        <p:spPr>
+          <a:xfrm>
+            <a:off x="457200" y="713232"/>
+            <a:ext cx="11368735" cy="274320"/>
+          </a:xfrm>
+          <a:prstGeom prst="rect">
+            <a:avLst/>
+          </a:prstGeom>
+          <a:noFill/>
+          <a:ln/>
+        </p:spPr>
+        <p:txBody>
+          <a:bodyPr wrap="square" lIns="0" tIns="0" rIns="0" bIns="0" rtlCol="0" anchor="ctr"/>
+          <a:lstStyle/>
+          <a:p>
+            <a:pPr algn="r" indent="0" marL="0">
+              <a:buNone/>
+            </a:pPr>
+            <a:r>
+              <a:rPr lang="en-US" sz="1400" b="1" dirty="0">
+                <a:solidFill>
+                  <a:srgbClr val="1C3F6E"/>
+                </a:solidFill>
+                <a:latin typeface="Calibri" pitchFamily="34" charset="0"/>
+                <a:ea typeface="Calibri" pitchFamily="34" charset="-122"/>
+                <a:cs typeface="Calibri" pitchFamily="34" charset="-120"/>
+              </a:rPr>
+              <a:t>HOMEWORK CORRECTION</a:t>
+            </a:r>
+            <a:endParaRPr lang="en-US" sz="1400" dirty="0"/>
+          </a:p>
+        </p:txBody>
+      </p:sp>
+      <p:pic>
+        <p:nvPicPr>
+          <p:cNvPr id="3" name="Image 0" descr="/home/claude/f4/img/minesec_sheet.png">    </p:cNvPr>
+          <p:cNvPicPr>
+            <a:picLocks noChangeAspect="1"/>
+          </p:cNvPicPr>
+          <p:nvPr/>
+        </p:nvPicPr>
+        <p:blipFill>
+          <a:blip r:embed="rId1"/>
+          <a:stretch>
+            <a:fillRect/>
+          </a:stretch>
+        </p:blipFill>
+        <p:spPr>
+          <a:xfrm>
+            <a:off x="0" y="658368"/>
+            <a:ext cx="5120640" cy="5833872"/>
+          </a:xfrm>
+          <a:prstGeom prst="rect">
+            <a:avLst/>
+          </a:prstGeom>
+        </p:spPr>
+      </p:pic>
+      <p:sp>
+        <p:nvSpPr>
+          <p:cNvPr id="4" name="Text 1"/>
+          <p:cNvSpPr/>
+          <p:nvPr/>
+        </p:nvSpPr>
+        <p:spPr>
+          <a:xfrm>
+            <a:off x="5349240" y="1005840"/>
+            <a:ext cx="6522415" cy="731520"/>
+          </a:xfrm>
+          <a:prstGeom prst="rect">
+            <a:avLst/>
+          </a:prstGeom>
+          <a:noFill/>
+          <a:ln/>
+        </p:spPr>
+        <p:txBody>
+          <a:bodyPr wrap="square" lIns="0" tIns="0" rIns="0" bIns="0" rtlCol="0" anchor="ctr">
+            <a:normAutofit/>
+          </a:bodyPr>
+          <a:lstStyle/>
+          <a:p>
+            <a:pPr algn="ctr" indent="0" marL="0">
+              <a:buNone/>
+            </a:pPr>
+            <a:r>
+              <a:rPr lang="en-US" sz="3600" b="1" dirty="0">
+                <a:solidFill>
+                  <a:srgbClr val="990011"/>
+                </a:solidFill>
+                <a:latin typeface="Times New Roman" pitchFamily="34" charset="0"/>
+                <a:ea typeface="Times New Roman" pitchFamily="34" charset="-122"/>
+                <a:cs typeface="Times New Roman" pitchFamily="34" charset="-120"/>
+              </a:rPr>
+              <a:t>Correction: Possible Answer</a:t>
+            </a:r>
+            <a:endParaRPr lang="en-US" sz="3600" dirty="0"/>
+          </a:p>
+        </p:txBody>
+      </p:sp>
+      <p:sp>
+        <p:nvSpPr>
+          <p:cNvPr id="5" name="Text 2"/>
+          <p:cNvSpPr/>
+          <p:nvPr/>
+        </p:nvSpPr>
+        <p:spPr>
+          <a:xfrm>
+            <a:off x="5349240" y="1783080"/>
+            <a:ext cx="6522415" cy="4663440"/>
+          </a:xfrm>
+          <a:prstGeom prst="rect">
+            <a:avLst/>
+          </a:prstGeom>
+          <a:noFill/>
+          <a:ln/>
+        </p:spPr>
+        <p:txBody>
+          <a:bodyPr wrap="square" lIns="0" tIns="0" rIns="0" bIns="0" rtlCol="0" anchor="t"/>
+          <a:lstStyle/>
+          <a:p>
+            <a:pPr algn="l" indent="0" marL="0">
+              <a:spcAft>
+                <a:spcPts val="800"/>
+              </a:spcAft>
+              <a:buNone/>
+            </a:pPr>
+            <a:r>
+              <a:rPr lang="en-US" sz="4000" dirty="0">
+                <a:solidFill>
+                  <a:srgbClr val="111111"/>
+                </a:solidFill>
+                <a:latin typeface="Times New Roman" pitchFamily="34" charset="0"/>
+                <a:ea typeface="Times New Roman" pitchFamily="34" charset="-122"/>
+                <a:cs typeface="Times New Roman" pitchFamily="34" charset="-120"/>
+              </a:rPr>
+              <a:t>Exports: crude oil, cocoa, timber (also coffee, cotton, bananas); imports: cars, machines, rice (also fuel products, medicines, clothes).</a:t>
+            </a:r>
+            <a:endParaRPr lang="en-US" sz="4000" dirty="0"/>
+          </a:p>
+        </p:txBody>
+      </p:sp>
+      <p:sp>
+        <p:nvSpPr>
+          <p:cNvPr id="25" name="Slide Number Placeholder 0"/>
+          <p:cNvSpPr>
+            <a:spLocks noGrp="1"/>
+          </p:cNvSpPr>
+          <p:nvPr>
+            <p:ph type="sldNum" sz="quarter" idx="4294967295"/>
+          </p:nvPr>
+        </p:nvSpPr>
+        <p:spPr>
+          <a:xfrm>
+            <a:off x="27432" y="91440"/>
+            <a:ext cx="585216" cy="475488"/>
+          </a:xfrm>
+          <a:prstGeom prst="rect">
+            <a:avLst/>
+          </a:prstGeom>
+          <a:extLst>
+            <a:ext uri="{C572A759-6A51-4108-AA02-DFA0A04FC94B}">
+              <ma14:wrappingTextBoxFlag xmlns:ma14="http://schemas.microsoft.com/office/mac/drawingml/2011/main" val="0"/>
+            </a:ext>
+          </a:extLst>
+        </p:spPr>
+        <p:txBody>
+          <a:bodyPr/>
+          <a:lstStyle>
+            <a:lvl1pPr>
+              <a:defRPr sz="2000">
+                <a:solidFill>
+                  <a:srgbClr val="FFFFFF"/>
+                </a:solidFill>
+                <a:latin typeface="Calibri"/>
+                <a:ea typeface="Calibri"/>
+                <a:cs typeface="Calibri"/>
+              </a:defRPr>
+            </a:lvl1pPr>
+          </a:lstStyle>
+          <a:p>
+            <a:pPr algn="ctr"/>
+            <a:fld id="{F7021451-1387-4CA6-816F-3879F97B5CBC}" type="slidenum">
+              <a:rPr b="1" lang="en-US"/>
+              <a:t>5</a:t>
+            </a:fld>
+            <a:endParaRPr lang="en-US"/>
+          </a:p>
+        </p:txBody>
+      </p:sp>
+    </p:spTree>
+  </p:cSld>
+  <p:clrMapOvr>
+    <a:masterClrMapping/>
+  </p:clrMapOvr>
+</p:sld>
+</file>
+
+<file path=ppt/slides/slide50.xml><?xml version="1.0" encoding="utf-8"?>
+<p:sld xmlns:a="http://schemas.openxmlformats.org/drawingml/2006/main" xmlns:r="http://schemas.openxmlformats.org/officeDocument/2006/relationships" xmlns:p="http://schemas.openxmlformats.org/presentationml/2006/main">
+  <p:cSld name="Slide 50">
+    <p:spTree>
+      <p:nvGrpSpPr>
+        <p:cNvPr id="1" name=""/>
+        <p:cNvGrpSpPr/>
+        <p:nvPr/>
+      </p:nvGrpSpPr>
+      <p:grpSpPr>
+        <a:xfrm>
+          <a:off x="0" y="0"/>
+          <a:ext cx="0" cy="0"/>
+          <a:chOff x="0" y="0"/>
+          <a:chExt cx="0" cy="0"/>
+        </a:xfrm>
+      </p:grpSpPr>
+      <p:sp>
+        <p:nvSpPr>
+          <p:cNvPr id="2" name="Text 0"/>
+          <p:cNvSpPr/>
+          <p:nvPr/>
+        </p:nvSpPr>
+        <p:spPr>
+          <a:xfrm>
+            <a:off x="457200" y="713232"/>
+            <a:ext cx="11368735" cy="274320"/>
+          </a:xfrm>
+          <a:prstGeom prst="rect">
+            <a:avLst/>
+          </a:prstGeom>
+          <a:noFill/>
+          <a:ln/>
+        </p:spPr>
+        <p:txBody>
+          <a:bodyPr wrap="square" lIns="0" tIns="0" rIns="0" bIns="0" rtlCol="0" anchor="ctr"/>
+          <a:lstStyle/>
+          <a:p>
+            <a:pPr algn="r" indent="0" marL="0">
+              <a:buNone/>
+            </a:pPr>
+            <a:r>
+              <a:rPr lang="en-US" sz="1400" b="1" dirty="0">
+                <a:solidFill>
+                  <a:srgbClr val="1C3F6E"/>
+                </a:solidFill>
+                <a:latin typeface="Calibri" pitchFamily="34" charset="0"/>
+                <a:ea typeface="Calibri" pitchFamily="34" charset="-122"/>
+                <a:cs typeface="Calibri" pitchFamily="34" charset="-120"/>
+              </a:rPr>
+              <a:t>FORMATIVE EVALUATION</a:t>
+            </a:r>
+            <a:endParaRPr lang="en-US" sz="1400" dirty="0"/>
+          </a:p>
+        </p:txBody>
+      </p:sp>
+      <p:pic>
+        <p:nvPicPr>
+          <p:cNvPr id="3" name="Image 0" descr="/home/claude/f4/img/minesec_sheet.png">    </p:cNvPr>
+          <p:cNvPicPr>
+            <a:picLocks noChangeAspect="1"/>
+          </p:cNvPicPr>
+          <p:nvPr/>
+        </p:nvPicPr>
+        <p:blipFill>
+          <a:blip r:embed="rId1"/>
+          <a:stretch>
+            <a:fillRect/>
+          </a:stretch>
+        </p:blipFill>
+        <p:spPr>
+          <a:xfrm>
+            <a:off x="0" y="658368"/>
+            <a:ext cx="5120640" cy="5833872"/>
+          </a:xfrm>
+          <a:prstGeom prst="rect">
+            <a:avLst/>
+          </a:prstGeom>
+        </p:spPr>
+      </p:pic>
+      <p:sp>
+        <p:nvSpPr>
+          <p:cNvPr id="4" name="Text 1"/>
+          <p:cNvSpPr/>
+          <p:nvPr/>
+        </p:nvSpPr>
+        <p:spPr>
+          <a:xfrm>
+            <a:off x="5349240" y="1005840"/>
+            <a:ext cx="6522415" cy="731520"/>
+          </a:xfrm>
+          <a:prstGeom prst="rect">
+            <a:avLst/>
+          </a:prstGeom>
+          <a:noFill/>
+          <a:ln/>
+        </p:spPr>
+        <p:txBody>
+          <a:bodyPr wrap="square" lIns="0" tIns="0" rIns="0" bIns="0" rtlCol="0" anchor="ctr">
+            <a:normAutofit/>
+          </a:bodyPr>
+          <a:lstStyle/>
+          <a:p>
+            <a:pPr algn="ctr" indent="0" marL="0">
+              <a:buNone/>
+            </a:pPr>
+            <a:r>
+              <a:rPr lang="en-US" sz="3600" b="1" dirty="0">
+                <a:solidFill>
+                  <a:srgbClr val="990011"/>
+                </a:solidFill>
+                <a:latin typeface="Times New Roman" pitchFamily="34" charset="0"/>
+                <a:ea typeface="Times New Roman" pitchFamily="34" charset="-122"/>
+                <a:cs typeface="Times New Roman" pitchFamily="34" charset="-120"/>
+              </a:rPr>
+              <a:t>Evaluation 2</a:t>
+            </a:r>
+            <a:endParaRPr lang="en-US" sz="3600" dirty="0"/>
+          </a:p>
+        </p:txBody>
+      </p:sp>
+      <p:sp>
+        <p:nvSpPr>
+          <p:cNvPr id="5" name="Text 2"/>
+          <p:cNvSpPr/>
+          <p:nvPr/>
+        </p:nvSpPr>
+        <p:spPr>
+          <a:xfrm>
+            <a:off x="5349240" y="1783080"/>
+            <a:ext cx="6522415" cy="4663440"/>
+          </a:xfrm>
+          <a:prstGeom prst="rect">
+            <a:avLst/>
+          </a:prstGeom>
+          <a:noFill/>
+          <a:ln/>
+        </p:spPr>
+        <p:txBody>
+          <a:bodyPr wrap="square" lIns="0" tIns="0" rIns="0" bIns="0" rtlCol="0" anchor="t"/>
+          <a:lstStyle/>
+          <a:p>
+            <a:pPr algn="l" indent="0" marL="0">
+              <a:spcAft>
+                <a:spcPts val="800"/>
+              </a:spcAft>
+              <a:buNone/>
+            </a:pPr>
+            <a:r>
+              <a:rPr lang="en-US" sz="4000" dirty="0">
+                <a:solidFill>
+                  <a:srgbClr val="111111"/>
+                </a:solidFill>
+                <a:latin typeface="Times New Roman" pitchFamily="34" charset="0"/>
+                <a:ea typeface="Times New Roman" pitchFamily="34" charset="-122"/>
+                <a:cs typeface="Times New Roman" pitchFamily="34" charset="-120"/>
+              </a:rPr>
+              <a:t>Name two trade blocs and one advantage.</a:t>
+            </a:r>
+            <a:endParaRPr lang="en-US" sz="4000" dirty="0"/>
+          </a:p>
+        </p:txBody>
+      </p:sp>
+      <p:sp>
+        <p:nvSpPr>
+          <p:cNvPr id="25" name="Slide Number Placeholder 0"/>
+          <p:cNvSpPr>
+            <a:spLocks noGrp="1"/>
+          </p:cNvSpPr>
+          <p:nvPr>
+            <p:ph type="sldNum" sz="quarter" idx="4294967295"/>
+          </p:nvPr>
+        </p:nvSpPr>
+        <p:spPr>
+          <a:xfrm>
+            <a:off x="27432" y="91440"/>
+            <a:ext cx="585216" cy="475488"/>
+          </a:xfrm>
+          <a:prstGeom prst="rect">
+            <a:avLst/>
+          </a:prstGeom>
+          <a:extLst>
+            <a:ext uri="{C572A759-6A51-4108-AA02-DFA0A04FC94B}">
+              <ma14:wrappingTextBoxFlag xmlns:ma14="http://schemas.microsoft.com/office/mac/drawingml/2011/main" val="0"/>
+            </a:ext>
+          </a:extLst>
+        </p:spPr>
+        <p:txBody>
+          <a:bodyPr/>
+          <a:lstStyle>
+            <a:lvl1pPr>
+              <a:defRPr sz="2000">
+                <a:solidFill>
+                  <a:srgbClr val="FFFFFF"/>
+                </a:solidFill>
+                <a:latin typeface="Calibri"/>
+                <a:ea typeface="Calibri"/>
+                <a:cs typeface="Calibri"/>
+              </a:defRPr>
+            </a:lvl1pPr>
+          </a:lstStyle>
+          <a:p>
+            <a:pPr algn="ctr"/>
+            <a:fld id="{F7021451-1387-4CA6-816F-3879F97B5CBC}" type="slidenum">
+              <a:rPr b="1" lang="en-US"/>
+              <a:t>50</a:t>
+            </a:fld>
+            <a:endParaRPr lang="en-US"/>
+          </a:p>
+        </p:txBody>
+      </p:sp>
+    </p:spTree>
+  </p:cSld>
+  <p:clrMapOvr>
+    <a:masterClrMapping/>
+  </p:clrMapOvr>
+</p:sld>
+</file>
+
+<file path=ppt/slides/slide51.xml><?xml version="1.0" encoding="utf-8"?>
+<p:sld xmlns:a="http://schemas.openxmlformats.org/drawingml/2006/main" xmlns:r="http://schemas.openxmlformats.org/officeDocument/2006/relationships" xmlns:p="http://schemas.openxmlformats.org/presentationml/2006/main">
+  <p:cSld name="Slide 51">
+    <p:spTree>
+      <p:nvGrpSpPr>
+        <p:cNvPr id="1" name=""/>
+        <p:cNvGrpSpPr/>
+        <p:nvPr/>
+      </p:nvGrpSpPr>
+      <p:grpSpPr>
+        <a:xfrm>
+          <a:off x="0" y="0"/>
+          <a:ext cx="0" cy="0"/>
+          <a:chOff x="0" y="0"/>
+          <a:chExt cx="0" cy="0"/>
+        </a:xfrm>
+      </p:grpSpPr>
+      <p:sp>
+        <p:nvSpPr>
+          <p:cNvPr id="2" name="Text 0"/>
+          <p:cNvSpPr/>
+          <p:nvPr/>
+        </p:nvSpPr>
+        <p:spPr>
+          <a:xfrm>
+            <a:off x="457200" y="713232"/>
+            <a:ext cx="11368735" cy="274320"/>
+          </a:xfrm>
+          <a:prstGeom prst="rect">
+            <a:avLst/>
+          </a:prstGeom>
+          <a:noFill/>
+          <a:ln/>
+        </p:spPr>
+        <p:txBody>
+          <a:bodyPr wrap="square" lIns="0" tIns="0" rIns="0" bIns="0" rtlCol="0" anchor="ctr"/>
+          <a:lstStyle/>
+          <a:p>
+            <a:pPr algn="r" indent="0" marL="0">
+              <a:buNone/>
+            </a:pPr>
+            <a:r>
+              <a:rPr lang="en-US" sz="1400" b="1" dirty="0">
+                <a:solidFill>
+                  <a:srgbClr val="1C3F6E"/>
+                </a:solidFill>
+                <a:latin typeface="Calibri" pitchFamily="34" charset="0"/>
+                <a:ea typeface="Calibri" pitchFamily="34" charset="-122"/>
+                <a:cs typeface="Calibri" pitchFamily="34" charset="-120"/>
+              </a:rPr>
+              <a:t>FORMATIVE EVALUATION</a:t>
+            </a:r>
+            <a:endParaRPr lang="en-US" sz="1400" dirty="0"/>
+          </a:p>
+        </p:txBody>
+      </p:sp>
+      <p:pic>
+        <p:nvPicPr>
+          <p:cNvPr id="3" name="Image 0" descr="/home/claude/f4/img/minesec_sheet.png">    </p:cNvPr>
+          <p:cNvPicPr>
+            <a:picLocks noChangeAspect="1"/>
+          </p:cNvPicPr>
+          <p:nvPr/>
+        </p:nvPicPr>
+        <p:blipFill>
+          <a:blip r:embed="rId1"/>
+          <a:stretch>
+            <a:fillRect/>
+          </a:stretch>
+        </p:blipFill>
+        <p:spPr>
+          <a:xfrm>
+            <a:off x="0" y="658368"/>
+            <a:ext cx="5120640" cy="5833872"/>
+          </a:xfrm>
+          <a:prstGeom prst="rect">
+            <a:avLst/>
+          </a:prstGeom>
+        </p:spPr>
+      </p:pic>
+      <p:sp>
+        <p:nvSpPr>
+          <p:cNvPr id="4" name="Text 1"/>
+          <p:cNvSpPr/>
+          <p:nvPr/>
+        </p:nvSpPr>
+        <p:spPr>
+          <a:xfrm>
+            <a:off x="5349240" y="1005840"/>
+            <a:ext cx="6522415" cy="731520"/>
+          </a:xfrm>
+          <a:prstGeom prst="rect">
+            <a:avLst/>
+          </a:prstGeom>
+          <a:noFill/>
+          <a:ln/>
+        </p:spPr>
+        <p:txBody>
+          <a:bodyPr wrap="square" lIns="0" tIns="0" rIns="0" bIns="0" rtlCol="0" anchor="ctr">
+            <a:normAutofit/>
+          </a:bodyPr>
+          <a:lstStyle/>
+          <a:p>
+            <a:pPr algn="ctr" indent="0" marL="0">
+              <a:buNone/>
+            </a:pPr>
+            <a:r>
+              <a:rPr lang="en-US" sz="3600" b="1" dirty="0">
+                <a:solidFill>
+                  <a:srgbClr val="990011"/>
+                </a:solidFill>
+                <a:latin typeface="Times New Roman" pitchFamily="34" charset="0"/>
+                <a:ea typeface="Times New Roman" pitchFamily="34" charset="-122"/>
+                <a:cs typeface="Times New Roman" pitchFamily="34" charset="-120"/>
+              </a:rPr>
+              <a:t>Expected Answer</a:t>
+            </a:r>
+            <a:endParaRPr lang="en-US" sz="3600" dirty="0"/>
+          </a:p>
+        </p:txBody>
+      </p:sp>
+      <p:sp>
+        <p:nvSpPr>
+          <p:cNvPr id="5" name="Text 2"/>
+          <p:cNvSpPr/>
+          <p:nvPr/>
+        </p:nvSpPr>
+        <p:spPr>
+          <a:xfrm>
+            <a:off x="5349240" y="1783080"/>
+            <a:ext cx="6522415" cy="4663440"/>
+          </a:xfrm>
+          <a:prstGeom prst="rect">
+            <a:avLst/>
+          </a:prstGeom>
+          <a:noFill/>
+          <a:ln/>
+        </p:spPr>
+        <p:txBody>
+          <a:bodyPr wrap="square" lIns="0" tIns="0" rIns="0" bIns="0" rtlCol="0" anchor="t"/>
+          <a:lstStyle/>
+          <a:p>
+            <a:pPr algn="l" indent="0" marL="0">
+              <a:spcAft>
+                <a:spcPts val="800"/>
+              </a:spcAft>
+              <a:buNone/>
+            </a:pPr>
+            <a:r>
+              <a:rPr lang="en-US" sz="4000" dirty="0">
+                <a:solidFill>
+                  <a:srgbClr val="111111"/>
+                </a:solidFill>
+                <a:latin typeface="Times New Roman" pitchFamily="34" charset="0"/>
+                <a:ea typeface="Times New Roman" pitchFamily="34" charset="-122"/>
+                <a:cs typeface="Times New Roman" pitchFamily="34" charset="-120"/>
+              </a:rPr>
+              <a:t>CEMAC and ECOWAS; a larger market.</a:t>
+            </a:r>
+            <a:endParaRPr lang="en-US" sz="4000" dirty="0"/>
+          </a:p>
+        </p:txBody>
+      </p:sp>
+      <p:sp>
+        <p:nvSpPr>
+          <p:cNvPr id="25" name="Slide Number Placeholder 0"/>
+          <p:cNvSpPr>
+            <a:spLocks noGrp="1"/>
+          </p:cNvSpPr>
+          <p:nvPr>
+            <p:ph type="sldNum" sz="quarter" idx="4294967295"/>
+          </p:nvPr>
+        </p:nvSpPr>
+        <p:spPr>
+          <a:xfrm>
+            <a:off x="27432" y="91440"/>
+            <a:ext cx="585216" cy="475488"/>
+          </a:xfrm>
+          <a:prstGeom prst="rect">
+            <a:avLst/>
+          </a:prstGeom>
+          <a:extLst>
+            <a:ext uri="{C572A759-6A51-4108-AA02-DFA0A04FC94B}">
+              <ma14:wrappingTextBoxFlag xmlns:ma14="http://schemas.microsoft.com/office/mac/drawingml/2011/main" val="0"/>
+            </a:ext>
+          </a:extLst>
+        </p:spPr>
+        <p:txBody>
+          <a:bodyPr/>
+          <a:lstStyle>
+            <a:lvl1pPr>
+              <a:defRPr sz="2000">
+                <a:solidFill>
+                  <a:srgbClr val="FFFFFF"/>
+                </a:solidFill>
+                <a:latin typeface="Calibri"/>
+                <a:ea typeface="Calibri"/>
+                <a:cs typeface="Calibri"/>
+              </a:defRPr>
+            </a:lvl1pPr>
+          </a:lstStyle>
+          <a:p>
+            <a:pPr algn="ctr"/>
+            <a:fld id="{F7021451-1387-4CA6-816F-3879F97B5CBC}" type="slidenum">
+              <a:rPr b="1" lang="en-US"/>
+              <a:t>51</a:t>
+            </a:fld>
+            <a:endParaRPr lang="en-US"/>
+          </a:p>
+        </p:txBody>
+      </p:sp>
+    </p:spTree>
+  </p:cSld>
+  <p:clrMapOvr>
+    <a:masterClrMapping/>
+  </p:clrMapOvr>
+</p:sld>
+</file>
+
+<file path=ppt/slides/slide52.xml><?xml version="1.0" encoding="utf-8"?>
+<p:sld xmlns:a="http://schemas.openxmlformats.org/drawingml/2006/main" xmlns:r="http://schemas.openxmlformats.org/officeDocument/2006/relationships" xmlns:p="http://schemas.openxmlformats.org/presentationml/2006/main">
+  <p:cSld name="Slide 52">
+    <p:spTree>
+      <p:nvGrpSpPr>
+        <p:cNvPr id="1" name=""/>
+        <p:cNvGrpSpPr/>
+        <p:nvPr/>
+      </p:nvGrpSpPr>
+      <p:grpSpPr>
+        <a:xfrm>
+          <a:off x="0" y="0"/>
+          <a:ext cx="0" cy="0"/>
+          <a:chOff x="0" y="0"/>
+          <a:chExt cx="0" cy="0"/>
+        </a:xfrm>
+      </p:grpSpPr>
+      <p:sp>
+        <p:nvSpPr>
+          <p:cNvPr id="2" name="Text 0"/>
+          <p:cNvSpPr/>
+          <p:nvPr/>
+        </p:nvSpPr>
+        <p:spPr>
+          <a:xfrm>
+            <a:off x="457200" y="713232"/>
+            <a:ext cx="11368735" cy="274320"/>
+          </a:xfrm>
+          <a:prstGeom prst="rect">
+            <a:avLst/>
+          </a:prstGeom>
+          <a:noFill/>
+          <a:ln/>
+        </p:spPr>
+        <p:txBody>
+          <a:bodyPr wrap="square" lIns="0" tIns="0" rIns="0" bIns="0" rtlCol="0" anchor="ctr"/>
+          <a:lstStyle/>
+          <a:p>
+            <a:pPr algn="r" indent="0" marL="0">
+              <a:buNone/>
+            </a:pPr>
+            <a:r>
+              <a:rPr lang="en-US" sz="1400" b="1" dirty="0">
+                <a:solidFill>
+                  <a:srgbClr val="1C3F6E"/>
+                </a:solidFill>
+                <a:latin typeface="Calibri" pitchFamily="34" charset="0"/>
+                <a:ea typeface="Calibri" pitchFamily="34" charset="-122"/>
+                <a:cs typeface="Calibri" pitchFamily="34" charset="-120"/>
+              </a:rPr>
+              <a:t>REMEDIATION</a:t>
+            </a:r>
+            <a:endParaRPr lang="en-US" sz="1400" dirty="0"/>
+          </a:p>
+        </p:txBody>
+      </p:sp>
+      <p:pic>
+        <p:nvPicPr>
+          <p:cNvPr id="3" name="Image 0" descr="/home/claude/f4/img/minesec_sheet.png">    </p:cNvPr>
+          <p:cNvPicPr>
+            <a:picLocks noChangeAspect="1"/>
+          </p:cNvPicPr>
+          <p:nvPr/>
+        </p:nvPicPr>
+        <p:blipFill>
+          <a:blip r:embed="rId1"/>
+          <a:stretch>
+            <a:fillRect/>
+          </a:stretch>
+        </p:blipFill>
+        <p:spPr>
+          <a:xfrm>
+            <a:off x="0" y="658368"/>
+            <a:ext cx="1463040" cy="5833872"/>
+          </a:xfrm>
+          <a:prstGeom prst="rect">
+            <a:avLst/>
+          </a:prstGeom>
+        </p:spPr>
+      </p:pic>
+      <p:sp>
+        <p:nvSpPr>
+          <p:cNvPr id="4" name="Text 1"/>
+          <p:cNvSpPr/>
+          <p:nvPr/>
+        </p:nvSpPr>
+        <p:spPr>
+          <a:xfrm>
+            <a:off x="1691640" y="1005840"/>
+            <a:ext cx="10180015" cy="731520"/>
+          </a:xfrm>
+          <a:prstGeom prst="rect">
+            <a:avLst/>
+          </a:prstGeom>
+          <a:noFill/>
+          <a:ln/>
+        </p:spPr>
+        <p:txBody>
+          <a:bodyPr wrap="square" lIns="0" tIns="0" rIns="0" bIns="0" rtlCol="0" anchor="ctr">
+            <a:normAutofit/>
+          </a:bodyPr>
+          <a:lstStyle/>
+          <a:p>
+            <a:pPr algn="ctr" indent="0" marL="0">
+              <a:buNone/>
+            </a:pPr>
+            <a:r>
+              <a:rPr lang="en-US" sz="3600" b="1" dirty="0">
+                <a:solidFill>
+                  <a:srgbClr val="990011"/>
+                </a:solidFill>
+                <a:latin typeface="Times New Roman" pitchFamily="34" charset="0"/>
+                <a:ea typeface="Times New Roman" pitchFamily="34" charset="-122"/>
+                <a:cs typeface="Times New Roman" pitchFamily="34" charset="-120"/>
+              </a:rPr>
+              <a:t>Remediation</a:t>
+            </a:r>
+            <a:endParaRPr lang="en-US" sz="3600" dirty="0"/>
+          </a:p>
+        </p:txBody>
+      </p:sp>
+      <p:sp>
+        <p:nvSpPr>
+          <p:cNvPr id="5" name="Text 2"/>
+          <p:cNvSpPr/>
+          <p:nvPr/>
+        </p:nvSpPr>
+        <p:spPr>
+          <a:xfrm>
+            <a:off x="1691640" y="1783080"/>
+            <a:ext cx="10180015" cy="4663440"/>
+          </a:xfrm>
+          <a:prstGeom prst="rect">
+            <a:avLst/>
+          </a:prstGeom>
+          <a:noFill/>
+          <a:ln/>
+        </p:spPr>
+        <p:txBody>
+          <a:bodyPr wrap="square" lIns="0" tIns="0" rIns="0" bIns="0" rtlCol="0" anchor="t"/>
+          <a:lstStyle/>
+          <a:p>
+            <a:pPr algn="l" indent="0" marL="0">
+              <a:spcAft>
+                <a:spcPts val="800"/>
+              </a:spcAft>
+              <a:buNone/>
+            </a:pPr>
+            <a:r>
+              <a:rPr lang="en-US" sz="4000" b="1" dirty="0">
+                <a:solidFill>
+                  <a:srgbClr val="111111"/>
+                </a:solidFill>
+                <a:latin typeface="Times New Roman" pitchFamily="34" charset="0"/>
+                <a:ea typeface="Times New Roman" pitchFamily="34" charset="-122"/>
+                <a:cs typeface="Times New Roman" pitchFamily="34" charset="-120"/>
+              </a:rPr>
+              <a:t>Fill in the blanks:</a:t>
+            </a:r>
+            <a:endParaRPr lang="en-US" sz="4000" dirty="0"/>
+          </a:p>
+          <a:p>
+            <a:pPr algn="l" marL="342900" indent="-342900">
+              <a:spcAft>
+                <a:spcPts val="800"/>
+              </a:spcAft>
+              <a:buSzPct val="100000"/>
+              <a:buFont typeface="+mj-lt"/>
+              <a:buAutoNum type="arabicPeriod" startAt="1"/>
+            </a:pPr>
+            <a:r>
+              <a:rPr lang="en-US" sz="4000" dirty="0">
+                <a:solidFill>
+                  <a:srgbClr val="111111"/>
+                </a:solidFill>
+                <a:latin typeface="Times New Roman" pitchFamily="34" charset="0"/>
+                <a:ea typeface="Times New Roman" pitchFamily="34" charset="-122"/>
+                <a:cs typeface="Times New Roman" pitchFamily="34" charset="-120"/>
+              </a:rPr>
+              <a:t>Cameroon belongs to the trade bloc ______.</a:t>
+            </a:r>
+            <a:endParaRPr lang="en-US" sz="4000" dirty="0"/>
+          </a:p>
+          <a:p>
+            <a:pPr algn="l" marL="342900" indent="-342900">
+              <a:spcAft>
+                <a:spcPts val="800"/>
+              </a:spcAft>
+              <a:buSzPct val="100000"/>
+              <a:buFont typeface="+mj-lt"/>
+              <a:buAutoNum type="arabicPeriod" startAt="1"/>
+            </a:pPr>
+            <a:r>
+              <a:rPr lang="en-US" sz="4000" dirty="0">
+                <a:solidFill>
+                  <a:srgbClr val="111111"/>
+                </a:solidFill>
+                <a:latin typeface="Times New Roman" pitchFamily="34" charset="0"/>
+                <a:ea typeface="Times New Roman" pitchFamily="34" charset="-122"/>
+                <a:cs typeface="Times New Roman" pitchFamily="34" charset="-120"/>
+              </a:rPr>
+              <a:t>The trade bloc of West Africa is ______.</a:t>
+            </a:r>
+            <a:endParaRPr lang="en-US" sz="4000" dirty="0"/>
+          </a:p>
+          <a:p>
+            <a:pPr algn="l" marL="342900" indent="-342900">
+              <a:spcAft>
+                <a:spcPts val="800"/>
+              </a:spcAft>
+              <a:buSzPct val="100000"/>
+              <a:buFont typeface="+mj-lt"/>
+              <a:buAutoNum type="arabicPeriod" startAt="1"/>
+            </a:pPr>
+            <a:r>
+              <a:rPr lang="en-US" sz="4000" dirty="0">
+                <a:solidFill>
+                  <a:srgbClr val="111111"/>
+                </a:solidFill>
+                <a:latin typeface="Times New Roman" pitchFamily="34" charset="0"/>
+                <a:ea typeface="Times New Roman" pitchFamily="34" charset="-122"/>
+                <a:cs typeface="Times New Roman" pitchFamily="34" charset="-120"/>
+              </a:rPr>
+              <a:t>The trade bloc of South-East Asia is ______.</a:t>
+            </a:r>
+            <a:endParaRPr lang="en-US" sz="4000" dirty="0"/>
+          </a:p>
+        </p:txBody>
+      </p:sp>
+      <p:sp>
+        <p:nvSpPr>
+          <p:cNvPr id="25" name="Slide Number Placeholder 0"/>
+          <p:cNvSpPr>
+            <a:spLocks noGrp="1"/>
+          </p:cNvSpPr>
+          <p:nvPr>
+            <p:ph type="sldNum" sz="quarter" idx="4294967295"/>
+          </p:nvPr>
+        </p:nvSpPr>
+        <p:spPr>
+          <a:xfrm>
+            <a:off x="27432" y="91440"/>
+            <a:ext cx="585216" cy="475488"/>
+          </a:xfrm>
+          <a:prstGeom prst="rect">
+            <a:avLst/>
+          </a:prstGeom>
+          <a:extLst>
+            <a:ext uri="{C572A759-6A51-4108-AA02-DFA0A04FC94B}">
+              <ma14:wrappingTextBoxFlag xmlns:ma14="http://schemas.microsoft.com/office/mac/drawingml/2011/main" val="0"/>
+            </a:ext>
+          </a:extLst>
+        </p:spPr>
+        <p:txBody>
+          <a:bodyPr/>
+          <a:lstStyle>
+            <a:lvl1pPr>
+              <a:defRPr sz="2000">
+                <a:solidFill>
+                  <a:srgbClr val="FFFFFF"/>
+                </a:solidFill>
+                <a:latin typeface="Calibri"/>
+                <a:ea typeface="Calibri"/>
+                <a:cs typeface="Calibri"/>
+              </a:defRPr>
+            </a:lvl1pPr>
+          </a:lstStyle>
+          <a:p>
+            <a:pPr algn="ctr"/>
+            <a:fld id="{F7021451-1387-4CA6-816F-3879F97B5CBC}" type="slidenum">
+              <a:rPr b="1" lang="en-US"/>
+              <a:t>52</a:t>
+            </a:fld>
+            <a:endParaRPr lang="en-US"/>
+          </a:p>
+        </p:txBody>
+      </p:sp>
+    </p:spTree>
+  </p:cSld>
+  <p:clrMapOvr>
+    <a:masterClrMapping/>
+  </p:clrMapOvr>
+</p:sld>
+</file>
+
+<file path=ppt/slides/slide53.xml><?xml version="1.0" encoding="utf-8"?>
+<p:sld xmlns:a="http://schemas.openxmlformats.org/drawingml/2006/main" xmlns:r="http://schemas.openxmlformats.org/officeDocument/2006/relationships" xmlns:p="http://schemas.openxmlformats.org/presentationml/2006/main">
+  <p:cSld name="Slide 53">
+    <p:spTree>
+      <p:nvGrpSpPr>
+        <p:cNvPr id="1" name=""/>
+        <p:cNvGrpSpPr/>
+        <p:nvPr/>
+      </p:nvGrpSpPr>
+      <p:grpSpPr>
+        <a:xfrm>
+          <a:off x="0" y="0"/>
+          <a:ext cx="0" cy="0"/>
+          <a:chOff x="0" y="0"/>
+          <a:chExt cx="0" cy="0"/>
+        </a:xfrm>
+      </p:grpSpPr>
+      <p:sp>
+        <p:nvSpPr>
+          <p:cNvPr id="2" name="Text 0"/>
+          <p:cNvSpPr/>
+          <p:nvPr/>
+        </p:nvSpPr>
+        <p:spPr>
+          <a:xfrm>
+            <a:off x="457200" y="713232"/>
+            <a:ext cx="11368735" cy="274320"/>
+          </a:xfrm>
+          <a:prstGeom prst="rect">
+            <a:avLst/>
+          </a:prstGeom>
+          <a:noFill/>
+          <a:ln/>
+        </p:spPr>
+        <p:txBody>
+          <a:bodyPr wrap="square" lIns="0" tIns="0" rIns="0" bIns="0" rtlCol="0" anchor="ctr"/>
+          <a:lstStyle/>
+          <a:p>
+            <a:pPr algn="r" indent="0" marL="0">
+              <a:buNone/>
+            </a:pPr>
+            <a:r>
+              <a:rPr lang="en-US" sz="1400" b="1" dirty="0">
+                <a:solidFill>
+                  <a:srgbClr val="1C3F6E"/>
+                </a:solidFill>
+                <a:latin typeface="Calibri" pitchFamily="34" charset="0"/>
+                <a:ea typeface="Calibri" pitchFamily="34" charset="-122"/>
+                <a:cs typeface="Calibri" pitchFamily="34" charset="-120"/>
+              </a:rPr>
+              <a:t>HOMEWORK</a:t>
+            </a:r>
+            <a:endParaRPr lang="en-US" sz="1400" dirty="0"/>
+          </a:p>
+        </p:txBody>
+      </p:sp>
+      <p:pic>
+        <p:nvPicPr>
+          <p:cNvPr id="3" name="Image 0" descr="/home/claude/f4/img/minesec_sheet.png">    </p:cNvPr>
+          <p:cNvPicPr>
+            <a:picLocks noChangeAspect="1"/>
+          </p:cNvPicPr>
+          <p:nvPr/>
+        </p:nvPicPr>
+        <p:blipFill>
+          <a:blip r:embed="rId1"/>
+          <a:stretch>
+            <a:fillRect/>
+          </a:stretch>
+        </p:blipFill>
+        <p:spPr>
+          <a:xfrm>
+            <a:off x="0" y="658368"/>
+            <a:ext cx="5120640" cy="5833872"/>
+          </a:xfrm>
+          <a:prstGeom prst="rect">
+            <a:avLst/>
+          </a:prstGeom>
+        </p:spPr>
+      </p:pic>
+      <p:sp>
+        <p:nvSpPr>
+          <p:cNvPr id="4" name="Text 1"/>
+          <p:cNvSpPr/>
+          <p:nvPr/>
+        </p:nvSpPr>
+        <p:spPr>
+          <a:xfrm>
+            <a:off x="5349240" y="1005840"/>
+            <a:ext cx="6522415" cy="731520"/>
+          </a:xfrm>
+          <a:prstGeom prst="rect">
+            <a:avLst/>
+          </a:prstGeom>
+          <a:noFill/>
+          <a:ln/>
+        </p:spPr>
+        <p:txBody>
+          <a:bodyPr wrap="square" lIns="0" tIns="0" rIns="0" bIns="0" rtlCol="0" anchor="ctr">
+            <a:normAutofit/>
+          </a:bodyPr>
+          <a:lstStyle/>
+          <a:p>
+            <a:pPr algn="ctr" indent="0" marL="0">
+              <a:buNone/>
+            </a:pPr>
+            <a:r>
+              <a:rPr lang="en-US" sz="3600" b="1" dirty="0">
+                <a:solidFill>
+                  <a:srgbClr val="990011"/>
+                </a:solidFill>
+                <a:latin typeface="Times New Roman" pitchFamily="34" charset="0"/>
+                <a:ea typeface="Times New Roman" pitchFamily="34" charset="-122"/>
+                <a:cs typeface="Times New Roman" pitchFamily="34" charset="-120"/>
+              </a:rPr>
+              <a:t>Homework</a:t>
+            </a:r>
+            <a:endParaRPr lang="en-US" sz="3600" dirty="0"/>
+          </a:p>
+        </p:txBody>
+      </p:sp>
+      <p:sp>
+        <p:nvSpPr>
+          <p:cNvPr id="5" name="Text 2"/>
+          <p:cNvSpPr/>
+          <p:nvPr/>
+        </p:nvSpPr>
+        <p:spPr>
+          <a:xfrm>
+            <a:off x="5349240" y="1783080"/>
+            <a:ext cx="6522415" cy="4663440"/>
+          </a:xfrm>
+          <a:prstGeom prst="rect">
+            <a:avLst/>
+          </a:prstGeom>
+          <a:noFill/>
+          <a:ln/>
+        </p:spPr>
+        <p:txBody>
+          <a:bodyPr wrap="square" lIns="0" tIns="0" rIns="0" bIns="0" rtlCol="0" anchor="t"/>
+          <a:lstStyle/>
+          <a:p>
+            <a:pPr algn="l" indent="0" marL="0">
+              <a:spcAft>
+                <a:spcPts val="800"/>
+              </a:spcAft>
+              <a:buNone/>
+            </a:pPr>
+            <a:r>
+              <a:rPr lang="en-US" sz="4000" dirty="0">
+                <a:solidFill>
+                  <a:srgbClr val="111111"/>
+                </a:solidFill>
+                <a:latin typeface="Times New Roman" pitchFamily="34" charset="0"/>
+                <a:ea typeface="Times New Roman" pitchFamily="34" charset="-122"/>
+                <a:cs typeface="Times New Roman" pitchFamily="34" charset="-120"/>
+              </a:rPr>
+              <a:t>Draw a sketch map of the CEMAC member states and name their capitals.</a:t>
+            </a:r>
+            <a:endParaRPr lang="en-US" sz="4000" dirty="0"/>
+          </a:p>
+        </p:txBody>
+      </p:sp>
+      <p:sp>
+        <p:nvSpPr>
+          <p:cNvPr id="25" name="Slide Number Placeholder 0"/>
+          <p:cNvSpPr>
+            <a:spLocks noGrp="1"/>
+          </p:cNvSpPr>
+          <p:nvPr>
+            <p:ph type="sldNum" sz="quarter" idx="4294967295"/>
+          </p:nvPr>
+        </p:nvSpPr>
+        <p:spPr>
+          <a:xfrm>
+            <a:off x="27432" y="91440"/>
+            <a:ext cx="585216" cy="475488"/>
+          </a:xfrm>
+          <a:prstGeom prst="rect">
+            <a:avLst/>
+          </a:prstGeom>
+          <a:extLst>
+            <a:ext uri="{C572A759-6A51-4108-AA02-DFA0A04FC94B}">
+              <ma14:wrappingTextBoxFlag xmlns:ma14="http://schemas.microsoft.com/office/mac/drawingml/2011/main" val="0"/>
+            </a:ext>
+          </a:extLst>
+        </p:spPr>
+        <p:txBody>
+          <a:bodyPr/>
+          <a:lstStyle>
+            <a:lvl1pPr>
+              <a:defRPr sz="2000">
+                <a:solidFill>
+                  <a:srgbClr val="FFFFFF"/>
+                </a:solidFill>
+                <a:latin typeface="Calibri"/>
+                <a:ea typeface="Calibri"/>
+                <a:cs typeface="Calibri"/>
+              </a:defRPr>
+            </a:lvl1pPr>
+          </a:lstStyle>
+          <a:p>
+            <a:pPr algn="ctr"/>
+            <a:fld id="{F7021451-1387-4CA6-816F-3879F97B5CBC}" type="slidenum">
+              <a:rPr b="1" lang="en-US"/>
+              <a:t>53</a:t>
+            </a:fld>
+            <a:endParaRPr lang="en-US"/>
+          </a:p>
+        </p:txBody>
+      </p:sp>
+    </p:spTree>
+  </p:cSld>
+  <p:clrMapOvr>
+    <a:masterClrMapping/>
+  </p:clrMapOvr>
+</p:sld>
+</file>
+
+<file path=ppt/slides/slide54.xml><?xml version="1.0" encoding="utf-8"?>
+<p:sld xmlns:a="http://schemas.openxmlformats.org/drawingml/2006/main" xmlns:r="http://schemas.openxmlformats.org/officeDocument/2006/relationships" xmlns:p="http://schemas.openxmlformats.org/presentationml/2006/main">
+  <p:cSld name="Slide 54">
+    <p:spTree>
+      <p:nvGrpSpPr>
+        <p:cNvPr id="1" name=""/>
+        <p:cNvGrpSpPr/>
+        <p:nvPr/>
+      </p:nvGrpSpPr>
+      <p:grpSpPr>
+        <a:xfrm>
+          <a:off x="0" y="0"/>
+          <a:ext cx="0" cy="0"/>
+          <a:chOff x="0" y="0"/>
+          <a:chExt cx="0" cy="0"/>
+        </a:xfrm>
+      </p:grpSpPr>
+      <p:sp>
+        <p:nvSpPr>
+          <p:cNvPr id="2" name="Text 0"/>
+          <p:cNvSpPr/>
+          <p:nvPr/>
+        </p:nvSpPr>
+        <p:spPr>
+          <a:xfrm>
+            <a:off x="457200" y="713232"/>
+            <a:ext cx="11368735" cy="274320"/>
+          </a:xfrm>
+          <a:prstGeom prst="rect">
+            <a:avLst/>
+          </a:prstGeom>
+          <a:noFill/>
+          <a:ln/>
+        </p:spPr>
+        <p:txBody>
+          <a:bodyPr wrap="square" lIns="0" tIns="0" rIns="0" bIns="0" rtlCol="0" anchor="ctr"/>
+          <a:lstStyle/>
+          <a:p>
+            <a:pPr algn="r" indent="0" marL="0">
+              <a:buNone/>
+            </a:pPr>
+            <a:r>
+              <a:rPr lang="en-US" sz="1400" b="1" dirty="0">
+                <a:solidFill>
+                  <a:srgbClr val="1C3F6E"/>
+                </a:solidFill>
+                <a:latin typeface="Calibri" pitchFamily="34" charset="0"/>
+                <a:ea typeface="Calibri" pitchFamily="34" charset="-122"/>
+                <a:cs typeface="Calibri" pitchFamily="34" charset="-120"/>
+              </a:rPr>
+              <a:t>NEXT LESSON</a:t>
+            </a:r>
+            <a:endParaRPr lang="en-US" sz="1400" dirty="0"/>
+          </a:p>
+        </p:txBody>
+      </p:sp>
+      <p:pic>
+        <p:nvPicPr>
+          <p:cNvPr id="3" name="Image 0" descr="/home/claude/f4/img/minesec_sheet.png">    </p:cNvPr>
+          <p:cNvPicPr>
+            <a:picLocks noChangeAspect="1"/>
+          </p:cNvPicPr>
+          <p:nvPr/>
+        </p:nvPicPr>
+        <p:blipFill>
+          <a:blip r:embed="rId1"/>
+          <a:stretch>
+            <a:fillRect/>
+          </a:stretch>
+        </p:blipFill>
+        <p:spPr>
+          <a:xfrm>
+            <a:off x="0" y="658368"/>
+            <a:ext cx="5120640" cy="5833872"/>
+          </a:xfrm>
+          <a:prstGeom prst="rect">
+            <a:avLst/>
+          </a:prstGeom>
+        </p:spPr>
+      </p:pic>
+      <p:sp>
+        <p:nvSpPr>
+          <p:cNvPr id="4" name="Text 1"/>
+          <p:cNvSpPr/>
+          <p:nvPr/>
+        </p:nvSpPr>
+        <p:spPr>
+          <a:xfrm>
+            <a:off x="5349240" y="1005840"/>
+            <a:ext cx="6522415" cy="731520"/>
+          </a:xfrm>
+          <a:prstGeom prst="rect">
+            <a:avLst/>
+          </a:prstGeom>
+          <a:noFill/>
+          <a:ln/>
+        </p:spPr>
+        <p:txBody>
+          <a:bodyPr wrap="square" lIns="0" tIns="0" rIns="0" bIns="0" rtlCol="0" anchor="ctr">
+            <a:normAutofit/>
+          </a:bodyPr>
+          <a:lstStyle/>
+          <a:p>
+            <a:pPr algn="ctr" indent="0" marL="0">
+              <a:buNone/>
+            </a:pPr>
+            <a:r>
+              <a:rPr lang="en-US" sz="3600" b="1" dirty="0">
+                <a:solidFill>
+                  <a:srgbClr val="990011"/>
+                </a:solidFill>
+                <a:latin typeface="Times New Roman" pitchFamily="34" charset="0"/>
+                <a:ea typeface="Times New Roman" pitchFamily="34" charset="-122"/>
+                <a:cs typeface="Times New Roman" pitchFamily="34" charset="-120"/>
+              </a:rPr>
+              <a:t>Next Lesson</a:t>
+            </a:r>
+            <a:endParaRPr lang="en-US" sz="3600" dirty="0"/>
+          </a:p>
+        </p:txBody>
+      </p:sp>
+      <p:sp>
+        <p:nvSpPr>
+          <p:cNvPr id="5" name="Text 2"/>
+          <p:cNvSpPr/>
+          <p:nvPr/>
+        </p:nvSpPr>
+        <p:spPr>
+          <a:xfrm>
+            <a:off x="5349240" y="1783080"/>
+            <a:ext cx="6522415" cy="4663440"/>
+          </a:xfrm>
+          <a:prstGeom prst="rect">
+            <a:avLst/>
+          </a:prstGeom>
+          <a:noFill/>
+          <a:ln/>
+        </p:spPr>
+        <p:txBody>
+          <a:bodyPr wrap="square" lIns="0" tIns="0" rIns="0" bIns="0" rtlCol="0" anchor="ctr"/>
+          <a:lstStyle/>
+          <a:p>
+            <a:pPr algn="ctr" indent="0" marL="0">
+              <a:spcAft>
+                <a:spcPts val="800"/>
+              </a:spcAft>
+              <a:buNone/>
+            </a:pPr>
+            <a:r>
+              <a:rPr lang="en-US" sz="4000" b="1" dirty="0">
+                <a:solidFill>
+                  <a:srgbClr val="111111"/>
+                </a:solidFill>
+                <a:latin typeface="Times New Roman" pitchFamily="34" charset="0"/>
+                <a:ea typeface="Times New Roman" pitchFamily="34" charset="-122"/>
+                <a:cs typeface="Times New Roman" pitchFamily="34" charset="-120"/>
+              </a:rPr>
+              <a:t>Our next lesson will be on:</a:t>
+            </a:r>
+            <a:endParaRPr lang="en-US" sz="4000" dirty="0"/>
+          </a:p>
+          <a:p>
+            <a:pPr algn="ctr" indent="0" marL="0">
+              <a:spcAft>
+                <a:spcPts val="800"/>
+              </a:spcAft>
+              <a:buNone/>
+            </a:pPr>
+            <a:r>
+              <a:rPr lang="en-US" sz="4000" b="1" dirty="0">
+                <a:solidFill>
+                  <a:srgbClr val="990011"/>
+                </a:solidFill>
+                <a:latin typeface="Times New Roman" pitchFamily="34" charset="0"/>
+                <a:ea typeface="Times New Roman" pitchFamily="34" charset="-122"/>
+                <a:cs typeface="Times New Roman" pitchFamily="34" charset="-120"/>
+              </a:rPr>
+              <a:t>Lesson 19: Tourism</a:t>
+            </a:r>
+            <a:endParaRPr lang="en-US" sz="4000" dirty="0"/>
+          </a:p>
+        </p:txBody>
+      </p:sp>
+      <p:sp>
+        <p:nvSpPr>
+          <p:cNvPr id="25" name="Slide Number Placeholder 0"/>
+          <p:cNvSpPr>
+            <a:spLocks noGrp="1"/>
+          </p:cNvSpPr>
+          <p:nvPr>
+            <p:ph type="sldNum" sz="quarter" idx="4294967295"/>
+          </p:nvPr>
+        </p:nvSpPr>
+        <p:spPr>
+          <a:xfrm>
+            <a:off x="27432" y="91440"/>
+            <a:ext cx="585216" cy="475488"/>
+          </a:xfrm>
+          <a:prstGeom prst="rect">
+            <a:avLst/>
+          </a:prstGeom>
+          <a:extLst>
+            <a:ext uri="{C572A759-6A51-4108-AA02-DFA0A04FC94B}">
+              <ma14:wrappingTextBoxFlag xmlns:ma14="http://schemas.microsoft.com/office/mac/drawingml/2011/main" val="0"/>
+            </a:ext>
+          </a:extLst>
+        </p:spPr>
+        <p:txBody>
+          <a:bodyPr/>
+          <a:lstStyle>
+            <a:lvl1pPr>
+              <a:defRPr sz="2000">
+                <a:solidFill>
+                  <a:srgbClr val="FFFFFF"/>
+                </a:solidFill>
+                <a:latin typeface="Calibri"/>
+                <a:ea typeface="Calibri"/>
+                <a:cs typeface="Calibri"/>
+              </a:defRPr>
+            </a:lvl1pPr>
+          </a:lstStyle>
+          <a:p>
+            <a:pPr algn="ctr"/>
+            <a:fld id="{F7021451-1387-4CA6-816F-3879F97B5CBC}" type="slidenum">
+              <a:rPr b="1" lang="en-US"/>
+              <a:t>54</a:t>
+            </a:fld>
+            <a:endParaRPr lang="en-US"/>
+          </a:p>
+        </p:txBody>
+      </p:sp>
+    </p:spTree>
+  </p:cSld>
+  <p:clrMapOvr>
+    <a:masterClrMapping/>
+  </p:clrMapOvr>
+</p:sld>
+</file>
+
+<file path=ppt/slides/slide55.xml><?xml version="1.0" encoding="utf-8"?>
+<p:sld xmlns:a="http://schemas.openxmlformats.org/drawingml/2006/main" xmlns:r="http://schemas.openxmlformats.org/officeDocument/2006/relationships" xmlns:p="http://schemas.openxmlformats.org/presentationml/2006/main">
+  <p:cSld name="Slide 55">
+    <p:spTree>
+      <p:nvGrpSpPr>
+        <p:cNvPr id="1" name=""/>
+        <p:cNvGrpSpPr/>
+        <p:nvPr/>
+      </p:nvGrpSpPr>
+      <p:grpSpPr>
+        <a:xfrm>
+          <a:off x="0" y="0"/>
+          <a:ext cx="0" cy="0"/>
+          <a:chOff x="0" y="0"/>
+          <a:chExt cx="0" cy="0"/>
+        </a:xfrm>
+      </p:grpSpPr>
+      <p:sp>
+        <p:nvSpPr>
+          <p:cNvPr id="2" name="Text 0"/>
+          <p:cNvSpPr/>
+          <p:nvPr/>
+        </p:nvSpPr>
+        <p:spPr>
+          <a:xfrm>
+            <a:off x="457200" y="713232"/>
+            <a:ext cx="11368735" cy="274320"/>
+          </a:xfrm>
+          <a:prstGeom prst="rect">
+            <a:avLst/>
+          </a:prstGeom>
+          <a:noFill/>
+          <a:ln/>
+        </p:spPr>
+        <p:txBody>
+          <a:bodyPr wrap="square" lIns="0" tIns="0" rIns="0" bIns="0" rtlCol="0" anchor="ctr"/>
+          <a:lstStyle/>
+          <a:p>
+            <a:pPr algn="r" indent="0" marL="0">
+              <a:buNone/>
+            </a:pPr>
+            <a:r>
+              <a:rPr lang="en-US" sz="1400" b="1" dirty="0">
+                <a:solidFill>
+                  <a:srgbClr val="1C3F6E"/>
+                </a:solidFill>
+                <a:latin typeface="Calibri" pitchFamily="34" charset="0"/>
+                <a:ea typeface="Calibri" pitchFamily="34" charset="-122"/>
+                <a:cs typeface="Calibri" pitchFamily="34" charset="-120"/>
+              </a:rPr>
+              <a:t>BILINGUAL GAME</a:t>
+            </a:r>
+            <a:endParaRPr lang="en-US" sz="1400" dirty="0"/>
+          </a:p>
+        </p:txBody>
+      </p:sp>
+      <p:sp>
+        <p:nvSpPr>
+          <p:cNvPr id="3" name="Text 1"/>
+          <p:cNvSpPr/>
+          <p:nvPr/>
+        </p:nvSpPr>
+        <p:spPr>
+          <a:xfrm>
+            <a:off x="457200" y="1005840"/>
+            <a:ext cx="11277295" cy="731520"/>
+          </a:xfrm>
+          <a:prstGeom prst="rect">
+            <a:avLst/>
+          </a:prstGeom>
+          <a:noFill/>
+          <a:ln/>
+        </p:spPr>
+        <p:txBody>
+          <a:bodyPr wrap="square" lIns="0" tIns="0" rIns="0" bIns="0" rtlCol="0" anchor="ctr"/>
+          <a:lstStyle/>
+          <a:p>
+            <a:pPr algn="ctr" indent="0" marL="0">
+              <a:buNone/>
+            </a:pPr>
+            <a:r>
+              <a:rPr lang="en-US" sz="3600" b="1" dirty="0">
+                <a:solidFill>
+                  <a:srgbClr val="990011"/>
+                </a:solidFill>
+                <a:latin typeface="Times New Roman" pitchFamily="34" charset="0"/>
+                <a:ea typeface="Times New Roman" pitchFamily="34" charset="-122"/>
+                <a:cs typeface="Times New Roman" pitchFamily="34" charset="-120"/>
+              </a:rPr>
               <a:t>Bilingual Game (Jeu Bilingue)</a:t>
             </a:r>
             <a:endParaRPr lang="en-US" sz="3600" dirty="0"/>
@@ -17344,7 +20113,7 @@
       </p:sp>
       <p:graphicFrame>
         <p:nvGraphicFramePr>
-          <p:cNvPr id="50" name="Table 0"/>
+          <p:cNvPr id="56" name="Table 0"/>
           <p:cNvGraphicFramePr>
             <a:graphicFrameLocks noGrp="1"/>
           </p:cNvGraphicFramePr>
@@ -18380,7 +21149,7 @@
             <a:pPr algn="ctr"/>
             <a:fld id="{F7021451-1387-4CA6-816F-3879F97B5CBC}" type="slidenum">
               <a:rPr b="1" lang="en-US"/>
-              <a:t>49</a:t>
+              <a:t>55</a:t>
             </a:fld>
             <a:endParaRPr lang="en-US"/>
           </a:p>
@@ -18394,9 +21163,9 @@
 </p:sld>
 </file>
 
-<file path=ppt/slides/slide5.xml><?xml version="1.0" encoding="utf-8"?>
+<file path=ppt/slides/slide56.xml><?xml version="1.0" encoding="utf-8"?>
 <p:sld xmlns:a="http://schemas.openxmlformats.org/drawingml/2006/main" xmlns:r="http://schemas.openxmlformats.org/officeDocument/2006/relationships" xmlns:p="http://schemas.openxmlformats.org/presentationml/2006/main">
-  <p:cSld name="Slide 5">
+  <p:cSld name="Slide 56">
     <p:spTree>
       <p:nvGrpSpPr>
         <p:cNvPr id="1" name=""/>
@@ -18444,46 +21213,22 @@
                 <a:ea typeface="Calibri" pitchFamily="34" charset="-122"/>
                 <a:cs typeface="Calibri" pitchFamily="34" charset="-120"/>
               </a:rPr>
-              <a:t>HOMEWORK CORRECTION</a:t>
+              <a:t>LOGBOOK</a:t>
             </a:r>
             <a:endParaRPr lang="en-US" sz="1400" dirty="0"/>
           </a:p>
         </p:txBody>
       </p:sp>
-      <p:pic>
-        <p:nvPicPr>
-          <p:cNvPr id="3" name="Image 0" descr="/home/claude/f4/img/minesec_sheet.png">    </p:cNvPr>
-          <p:cNvPicPr>
-            <a:picLocks noChangeAspect="1"/>
-          </p:cNvPicPr>
-          <p:nvPr/>
-        </p:nvPicPr>
-        <p:blipFill>
-          <a:blip r:embed="rId1"/>
-          <a:stretch>
-            <a:fillRect/>
-          </a:stretch>
-        </p:blipFill>
-        <p:spPr>
-          <a:xfrm>
-            <a:off x="0" y="658368"/>
-            <a:ext cx="5120640" cy="5833872"/>
-          </a:xfrm>
-          <a:prstGeom prst="rect">
-            <a:avLst/>
-          </a:prstGeom>
-        </p:spPr>
-      </p:pic>
-      <p:sp>
-        <p:nvSpPr>
-          <p:cNvPr id="4" name="Text 1"/>
+      <p:sp>
+        <p:nvSpPr>
+          <p:cNvPr id="3" name="Text 1"/>
           <p:cNvSpPr/>
           <p:nvPr/>
         </p:nvSpPr>
         <p:spPr>
           <a:xfrm>
-            <a:off x="5349240" y="1005840"/>
-            <a:ext cx="6522415" cy="731520"/>
+            <a:off x="457200" y="1005840"/>
+            <a:ext cx="11277295" cy="731520"/>
           </a:xfrm>
           <a:prstGeom prst="rect">
             <a:avLst/>
@@ -18492,9 +21237,7 @@
           <a:ln/>
         </p:spPr>
         <p:txBody>
-          <a:bodyPr wrap="square" lIns="0" tIns="0" rIns="0" bIns="0" rtlCol="0" anchor="ctr">
-            <a:normAutofit/>
-          </a:bodyPr>
+          <a:bodyPr wrap="square" lIns="0" tIns="0" rIns="0" bIns="0" rtlCol="0" anchor="ctr"/>
           <a:lstStyle/>
           <a:p>
             <a:pPr algn="ctr" indent="0" marL="0">
@@ -18509,199 +21252,6 @@
                 <a:ea typeface="Times New Roman" pitchFamily="34" charset="-122"/>
                 <a:cs typeface="Times New Roman" pitchFamily="34" charset="-120"/>
               </a:rPr>
-              <a:t>Correction: Possible Answer</a:t>
-            </a:r>
-            <a:endParaRPr lang="en-US" sz="3600" dirty="0"/>
-          </a:p>
-        </p:txBody>
-      </p:sp>
-      <p:sp>
-        <p:nvSpPr>
-          <p:cNvPr id="5" name="Text 2"/>
-          <p:cNvSpPr/>
-          <p:nvPr/>
-        </p:nvSpPr>
-        <p:spPr>
-          <a:xfrm>
-            <a:off x="5349240" y="1783080"/>
-            <a:ext cx="6522415" cy="4663440"/>
-          </a:xfrm>
-          <a:prstGeom prst="rect">
-            <a:avLst/>
-          </a:prstGeom>
-          <a:noFill/>
-          <a:ln/>
-        </p:spPr>
-        <p:txBody>
-          <a:bodyPr wrap="square" lIns="0" tIns="0" rIns="0" bIns="0" rtlCol="0" anchor="t"/>
-          <a:lstStyle/>
-          <a:p>
-            <a:pPr algn="l" indent="0" marL="0">
-              <a:spcAft>
-                <a:spcPts val="800"/>
-              </a:spcAft>
-              <a:buNone/>
-            </a:pPr>
-            <a:r>
-              <a:rPr lang="en-US" sz="4000" dirty="0">
-                <a:solidFill>
-                  <a:srgbClr val="111111"/>
-                </a:solidFill>
-                <a:latin typeface="Times New Roman" pitchFamily="34" charset="0"/>
-                <a:ea typeface="Times New Roman" pitchFamily="34" charset="-122"/>
-                <a:cs typeface="Times New Roman" pitchFamily="34" charset="-120"/>
-              </a:rPr>
-              <a:t>Exports: crude oil, cocoa, timber (also coffee, cotton, bananas); imports: cars, machines, rice (also fuel products, medicines, clothes).</a:t>
-            </a:r>
-            <a:endParaRPr lang="en-US" sz="4000" dirty="0"/>
-          </a:p>
-        </p:txBody>
-      </p:sp>
-      <p:sp>
-        <p:nvSpPr>
-          <p:cNvPr id="25" name="Slide Number Placeholder 0"/>
-          <p:cNvSpPr>
-            <a:spLocks noGrp="1"/>
-          </p:cNvSpPr>
-          <p:nvPr>
-            <p:ph type="sldNum" sz="quarter" idx="4294967295"/>
-          </p:nvPr>
-        </p:nvSpPr>
-        <p:spPr>
-          <a:xfrm>
-            <a:off x="27432" y="91440"/>
-            <a:ext cx="585216" cy="475488"/>
-          </a:xfrm>
-          <a:prstGeom prst="rect">
-            <a:avLst/>
-          </a:prstGeom>
-          <a:extLst>
-            <a:ext uri="{C572A759-6A51-4108-AA02-DFA0A04FC94B}">
-              <ma14:wrappingTextBoxFlag xmlns:ma14="http://schemas.microsoft.com/office/mac/drawingml/2011/main" val="0"/>
-            </a:ext>
-          </a:extLst>
-        </p:spPr>
-        <p:txBody>
-          <a:bodyPr/>
-          <a:lstStyle>
-            <a:lvl1pPr>
-              <a:defRPr sz="2000">
-                <a:solidFill>
-                  <a:srgbClr val="FFFFFF"/>
-                </a:solidFill>
-                <a:latin typeface="Calibri"/>
-                <a:ea typeface="Calibri"/>
-                <a:cs typeface="Calibri"/>
-              </a:defRPr>
-            </a:lvl1pPr>
-          </a:lstStyle>
-          <a:p>
-            <a:pPr algn="ctr"/>
-            <a:fld id="{F7021451-1387-4CA6-816F-3879F97B5CBC}" type="slidenum">
-              <a:rPr b="1" lang="en-US"/>
-              <a:t>5</a:t>
-            </a:fld>
-            <a:endParaRPr lang="en-US"/>
-          </a:p>
-        </p:txBody>
-      </p:sp>
-    </p:spTree>
-  </p:cSld>
-  <p:clrMapOvr>
-    <a:masterClrMapping/>
-  </p:clrMapOvr>
-</p:sld>
-</file>
-
-<file path=ppt/slides/slide50.xml><?xml version="1.0" encoding="utf-8"?>
-<p:sld xmlns:a="http://schemas.openxmlformats.org/drawingml/2006/main" xmlns:r="http://schemas.openxmlformats.org/officeDocument/2006/relationships" xmlns:p="http://schemas.openxmlformats.org/presentationml/2006/main">
-  <p:cSld name="Slide 50">
-    <p:spTree>
-      <p:nvGrpSpPr>
-        <p:cNvPr id="1" name=""/>
-        <p:cNvGrpSpPr/>
-        <p:nvPr/>
-      </p:nvGrpSpPr>
-      <p:grpSpPr>
-        <a:xfrm>
-          <a:off x="0" y="0"/>
-          <a:ext cx="0" cy="0"/>
-          <a:chOff x="0" y="0"/>
-          <a:chExt cx="0" cy="0"/>
-        </a:xfrm>
-      </p:grpSpPr>
-      <p:sp>
-        <p:nvSpPr>
-          <p:cNvPr id="2" name="Text 0"/>
-          <p:cNvSpPr/>
-          <p:nvPr/>
-        </p:nvSpPr>
-        <p:spPr>
-          <a:xfrm>
-            <a:off x="457200" y="713232"/>
-            <a:ext cx="11368735" cy="274320"/>
-          </a:xfrm>
-          <a:prstGeom prst="rect">
-            <a:avLst/>
-          </a:prstGeom>
-          <a:noFill/>
-          <a:ln/>
-        </p:spPr>
-        <p:txBody>
-          <a:bodyPr wrap="square" lIns="0" tIns="0" rIns="0" bIns="0" rtlCol="0" anchor="ctr"/>
-          <a:lstStyle/>
-          <a:p>
-            <a:pPr algn="r" indent="0" marL="0">
-              <a:buNone/>
-            </a:pPr>
-            <a:r>
-              <a:rPr lang="en-US" sz="1400" b="1" dirty="0">
-                <a:solidFill>
-                  <a:srgbClr val="1C3F6E"/>
-                </a:solidFill>
-                <a:latin typeface="Calibri" pitchFamily="34" charset="0"/>
-                <a:ea typeface="Calibri" pitchFamily="34" charset="-122"/>
-                <a:cs typeface="Calibri" pitchFamily="34" charset="-120"/>
-              </a:rPr>
-              <a:t>LOGBOOK</a:t>
-            </a:r>
-            <a:endParaRPr lang="en-US" sz="1400" dirty="0"/>
-          </a:p>
-        </p:txBody>
-      </p:sp>
-      <p:sp>
-        <p:nvSpPr>
-          <p:cNvPr id="3" name="Text 1"/>
-          <p:cNvSpPr/>
-          <p:nvPr/>
-        </p:nvSpPr>
-        <p:spPr>
-          <a:xfrm>
-            <a:off x="457200" y="1005840"/>
-            <a:ext cx="11277295" cy="731520"/>
-          </a:xfrm>
-          <a:prstGeom prst="rect">
-            <a:avLst/>
-          </a:prstGeom>
-          <a:noFill/>
-          <a:ln/>
-        </p:spPr>
-        <p:txBody>
-          <a:bodyPr wrap="square" lIns="0" tIns="0" rIns="0" bIns="0" rtlCol="0" anchor="ctr"/>
-          <a:lstStyle/>
-          <a:p>
-            <a:pPr algn="ctr" indent="0" marL="0">
-              <a:buNone/>
-            </a:pPr>
-            <a:r>
-              <a:rPr lang="en-US" sz="3600" b="1" dirty="0">
-                <a:solidFill>
-                  <a:srgbClr val="990011"/>
-                </a:solidFill>
-                <a:latin typeface="Times New Roman" pitchFamily="34" charset="0"/>
-                <a:ea typeface="Times New Roman" pitchFamily="34" charset="-122"/>
-                <a:cs typeface="Times New Roman" pitchFamily="34" charset="-120"/>
-              </a:rPr>
               <a:t>Official Logbook (1/2)</a:t>
             </a:r>
             <a:endParaRPr lang="en-US" sz="3600" dirty="0"/>
@@ -18710,7 +21260,7 @@
       </p:sp>
       <p:graphicFrame>
         <p:nvGraphicFramePr>
-          <p:cNvPr id="51" name="Table 0"/>
+          <p:cNvPr id="57" name="Table 0"/>
           <p:cNvGraphicFramePr>
             <a:graphicFrameLocks noGrp="1"/>
           </p:cNvGraphicFramePr>
@@ -19332,7 +21882,7 @@
             <a:pPr algn="ctr"/>
             <a:fld id="{F7021451-1387-4CA6-816F-3879F97B5CBC}" type="slidenum">
               <a:rPr b="1" lang="en-US"/>
-              <a:t>50</a:t>
+              <a:t>56</a:t>
             </a:fld>
             <a:endParaRPr lang="en-US"/>
           </a:p>
@@ -19346,9 +21896,9 @@
 </p:sld>
 </file>
 
-<file path=ppt/slides/slide51.xml><?xml version="1.0" encoding="utf-8"?>
+<file path=ppt/slides/slide57.xml><?xml version="1.0" encoding="utf-8"?>
 <p:sld xmlns:a="http://schemas.openxmlformats.org/drawingml/2006/main" xmlns:r="http://schemas.openxmlformats.org/officeDocument/2006/relationships" xmlns:p="http://schemas.openxmlformats.org/presentationml/2006/main">
-  <p:cSld name="Slide 51">
+  <p:cSld name="Slide 57">
     <p:spTree>
       <p:nvGrpSpPr>
         <p:cNvPr id="1" name=""/>
@@ -19443,7 +21993,7 @@
       </p:sp>
       <p:graphicFrame>
         <p:nvGraphicFramePr>
-          <p:cNvPr id="52" name="Table 0"/>
+          <p:cNvPr id="58" name="Table 0"/>
           <p:cNvGraphicFramePr>
             <a:graphicFrameLocks noGrp="1"/>
           </p:cNvGraphicFramePr>
@@ -19553,7 +22103,7 @@
                           <a:ea typeface="Calibri" pitchFamily="34" charset="-122"/>
                           <a:cs typeface="Calibri" pitchFamily="34" charset="-120"/>
                         </a:rPr>
-                        <a:t>DEFINITIONS; Types, Aims and Reasons for Creation; Case Study: CEMAC; Advantages and Disadvantages.</a:t>
+                        <a:t>DEFINITIONS; Types; Examples, Aims and Reasons; Members and Achievements; Problems; Advantages; Disadvantages.</a:t>
                       </a:r>
                       <a:endParaRPr lang="en-US" sz="1600" dirty="0">
                         <a:latin typeface="Calibri" charset="0"/>
@@ -20203,7 +22753,7 @@
             <a:pPr algn="ctr"/>
             <a:fld id="{F7021451-1387-4CA6-816F-3879F97B5CBC}" type="slidenum">
               <a:rPr b="1" lang="en-US"/>
-              <a:t>51</a:t>
+              <a:t>57</a:t>
             </a:fld>
             <a:endParaRPr lang="en-US"/>
           </a:p>
@@ -20217,9 +22767,9 @@
 </p:sld>
 </file>
 
-<file path=ppt/slides/slide52.xml><?xml version="1.0" encoding="utf-8"?>
+<file path=ppt/slides/slide58.xml><?xml version="1.0" encoding="utf-8"?>
 <p:sld xmlns:a="http://schemas.openxmlformats.org/drawingml/2006/main" xmlns:r="http://schemas.openxmlformats.org/officeDocument/2006/relationships" xmlns:p="http://schemas.openxmlformats.org/presentationml/2006/main">
-  <p:cSld name="Slide 52">
+  <p:cSld name="Slide 58">
     <p:spTree>
       <p:nvGrpSpPr>
         <p:cNvPr id="1" name=""/>
@@ -20528,7 +23078,7 @@
             <a:pPr algn="ctr"/>
             <a:fld id="{F7021451-1387-4CA6-816F-3879F97B5CBC}" type="slidenum">
               <a:rPr b="1" lang="en-US"/>
-              <a:t>52</a:t>
+              <a:t>58</a:t>
             </a:fld>
             <a:endParaRPr lang="en-US"/>
           </a:p>
@@ -20542,9 +23092,9 @@
 </p:sld>
 </file>
 
-<file path=ppt/slides/slide53.xml><?xml version="1.0" encoding="utf-8"?>
+<file path=ppt/slides/slide59.xml><?xml version="1.0" encoding="utf-8"?>
 <p:sld xmlns:a="http://schemas.openxmlformats.org/drawingml/2006/main" xmlns:r="http://schemas.openxmlformats.org/officeDocument/2006/relationships" xmlns:p="http://schemas.openxmlformats.org/presentationml/2006/main">
-  <p:cSld name="Slide 53">
+  <p:cSld name="Slide 59">
     <p:spTree>
       <p:nvGrpSpPr>
         <p:cNvPr id="1" name=""/>
@@ -20790,7 +23340,7 @@
             <a:pPr algn="ctr"/>
             <a:fld id="{F7021451-1387-4CA6-816F-3879F97B5CBC}" type="slidenum">
               <a:rPr b="1" lang="en-US"/>
-              <a:t>53</a:t>
+              <a:t>59</a:t>
             </a:fld>
             <a:endParaRPr lang="en-US"/>
           </a:p>
